--- a/Project PPT.pptx
+++ b/Project PPT.pptx
@@ -5,19 +5,17 @@
     <p:sldMasterId id="2147483648" r:id="rId1"/>
   </p:sldMasterIdLst>
   <p:sldIdLst>
-    <p:sldId id="256" r:id="rId7"/>
-    <p:sldId id="257" r:id="rId8"/>
-    <p:sldId id="258" r:id="rId9"/>
-    <p:sldId id="259" r:id="rId10"/>
-    <p:sldId id="260" r:id="rId11"/>
-    <p:sldId id="261" r:id="rId12"/>
-    <p:sldId id="262" r:id="rId13"/>
-    <p:sldId id="263" r:id="rId14"/>
-    <p:sldId id="264" r:id="rId15"/>
-    <p:sldId id="265" r:id="rId16"/>
-    <p:sldId id="266" r:id="rId17"/>
-    <p:sldId id="267" r:id="rId18"/>
-    <p:sldId id="268" r:id="rId19"/>
+    <p:sldId id="256" r:id="rId2"/>
+    <p:sldId id="257" r:id="rId3"/>
+    <p:sldId id="258" r:id="rId4"/>
+    <p:sldId id="259" r:id="rId5"/>
+    <p:sldId id="260" r:id="rId6"/>
+    <p:sldId id="261" r:id="rId7"/>
+    <p:sldId id="263" r:id="rId8"/>
+    <p:sldId id="264" r:id="rId9"/>
+    <p:sldId id="266" r:id="rId10"/>
+    <p:sldId id="267" r:id="rId11"/>
+    <p:sldId id="268" r:id="rId12"/>
   </p:sldIdLst>
   <p:sldSz cx="9144000" cy="6858000" type="screen4x3"/>
   <p:notesSz cx="6858000" cy="9144000"/>
@@ -116,6 +114,22 @@
       </a:defRPr>
     </a:lvl9pPr>
   </p:defaultTextStyle>
+  <p:extLst>
+    <p:ext uri="{EFAFB233-063F-42B5-8137-9DF3F51BA10A}">
+      <p15:sldGuideLst xmlns:p15="http://schemas.microsoft.com/office/powerpoint/2012/main">
+        <p15:guide id="1" orient="horz" pos="2160">
+          <p15:clr>
+            <a:srgbClr val="A4A3A4"/>
+          </p15:clr>
+        </p15:guide>
+        <p15:guide id="2" pos="2880">
+          <p15:clr>
+            <a:srgbClr val="A4A3A4"/>
+          </p15:clr>
+        </p15:guide>
+      </p15:sldGuideLst>
+    </p:ext>
+  </p:extLst>
 </p:presentation>
 </file>
 
@@ -157,10 +171,9 @@
           <a:lstStyle/>
           <a:p>
             <a:r>
-              <a:rPr lang="en-US" smtClean="0"/>
+              <a:rPr lang="en-US"/>
               <a:t>Click to edit Master title style</a:t>
             </a:r>
-            <a:endParaRPr lang="en-US"/>
           </a:p>
         </p:txBody>
       </p:sp>
@@ -276,10 +289,9 @@
           </a:lstStyle>
           <a:p>
             <a:r>
-              <a:rPr lang="en-US" smtClean="0"/>
+              <a:rPr lang="en-US"/>
               <a:t>Click to edit Master subtitle style</a:t>
             </a:r>
-            <a:endParaRPr lang="en-US"/>
           </a:p>
         </p:txBody>
       </p:sp>
@@ -300,7 +312,7 @@
           <a:p>
             <a:fld id="{5BCAD085-E8A6-8845-BD4E-CB4CCA059FC4}" type="datetimeFigureOut">
               <a:rPr lang="en-US" smtClean="0"/>
-              <a:t>1/27/13</a:t>
+              <a:t>3/13/2026</a:t>
             </a:fld>
             <a:endParaRPr lang="en-US"/>
           </a:p>
@@ -394,10 +406,9 @@
           <a:lstStyle/>
           <a:p>
             <a:r>
-              <a:rPr lang="en-US" smtClean="0"/>
+              <a:rPr lang="en-US"/>
               <a:t>Click to edit Master title style</a:t>
             </a:r>
-            <a:endParaRPr lang="en-US"/>
           </a:p>
         </p:txBody>
       </p:sp>
@@ -418,38 +429,37 @@
           <a:p>
             <a:pPr lvl="0"/>
             <a:r>
-              <a:rPr lang="en-US" smtClean="0"/>
+              <a:rPr lang="en-US"/>
               <a:t>Click to edit Master text styles</a:t>
             </a:r>
           </a:p>
           <a:p>
             <a:pPr lvl="1"/>
             <a:r>
-              <a:rPr lang="en-US" smtClean="0"/>
+              <a:rPr lang="en-US"/>
               <a:t>Second level</a:t>
             </a:r>
           </a:p>
           <a:p>
             <a:pPr lvl="2"/>
             <a:r>
-              <a:rPr lang="en-US" smtClean="0"/>
+              <a:rPr lang="en-US"/>
               <a:t>Third level</a:t>
             </a:r>
           </a:p>
           <a:p>
             <a:pPr lvl="3"/>
             <a:r>
-              <a:rPr lang="en-US" smtClean="0"/>
+              <a:rPr lang="en-US"/>
               <a:t>Fourth level</a:t>
             </a:r>
           </a:p>
           <a:p>
             <a:pPr lvl="4"/>
             <a:r>
-              <a:rPr lang="en-US" smtClean="0"/>
+              <a:rPr lang="en-US"/>
               <a:t>Fifth level</a:t>
             </a:r>
-            <a:endParaRPr lang="en-US"/>
           </a:p>
         </p:txBody>
       </p:sp>
@@ -470,7 +480,7 @@
           <a:p>
             <a:fld id="{5BCAD085-E8A6-8845-BD4E-CB4CCA059FC4}" type="datetimeFigureOut">
               <a:rPr lang="en-US" smtClean="0"/>
-              <a:t>1/27/13</a:t>
+              <a:t>3/13/2026</a:t>
             </a:fld>
             <a:endParaRPr lang="en-US"/>
           </a:p>
@@ -569,10 +579,9 @@
           <a:lstStyle/>
           <a:p>
             <a:r>
-              <a:rPr lang="en-US" smtClean="0"/>
+              <a:rPr lang="en-US"/>
               <a:t>Click to edit Master title style</a:t>
             </a:r>
-            <a:endParaRPr lang="en-US"/>
           </a:p>
         </p:txBody>
       </p:sp>
@@ -598,38 +607,37 @@
           <a:p>
             <a:pPr lvl="0"/>
             <a:r>
-              <a:rPr lang="en-US" smtClean="0"/>
+              <a:rPr lang="en-US"/>
               <a:t>Click to edit Master text styles</a:t>
             </a:r>
           </a:p>
           <a:p>
             <a:pPr lvl="1"/>
             <a:r>
-              <a:rPr lang="en-US" smtClean="0"/>
+              <a:rPr lang="en-US"/>
               <a:t>Second level</a:t>
             </a:r>
           </a:p>
           <a:p>
             <a:pPr lvl="2"/>
             <a:r>
-              <a:rPr lang="en-US" smtClean="0"/>
+              <a:rPr lang="en-US"/>
               <a:t>Third level</a:t>
             </a:r>
           </a:p>
           <a:p>
             <a:pPr lvl="3"/>
             <a:r>
-              <a:rPr lang="en-US" smtClean="0"/>
+              <a:rPr lang="en-US"/>
               <a:t>Fourth level</a:t>
             </a:r>
           </a:p>
           <a:p>
             <a:pPr lvl="4"/>
             <a:r>
-              <a:rPr lang="en-US" smtClean="0"/>
+              <a:rPr lang="en-US"/>
               <a:t>Fifth level</a:t>
             </a:r>
-            <a:endParaRPr lang="en-US"/>
           </a:p>
         </p:txBody>
       </p:sp>
@@ -650,7 +658,7 @@
           <a:p>
             <a:fld id="{5BCAD085-E8A6-8845-BD4E-CB4CCA059FC4}" type="datetimeFigureOut">
               <a:rPr lang="en-US" smtClean="0"/>
-              <a:t>1/27/13</a:t>
+              <a:t>3/13/2026</a:t>
             </a:fld>
             <a:endParaRPr lang="en-US"/>
           </a:p>
@@ -744,10 +752,9 @@
           <a:lstStyle/>
           <a:p>
             <a:r>
-              <a:rPr lang="en-US" smtClean="0"/>
+              <a:rPr lang="en-US"/>
               <a:t>Click to edit Master title style</a:t>
             </a:r>
-            <a:endParaRPr lang="en-US"/>
           </a:p>
         </p:txBody>
       </p:sp>
@@ -768,38 +775,37 @@
           <a:p>
             <a:pPr lvl="0"/>
             <a:r>
-              <a:rPr lang="en-US" smtClean="0"/>
+              <a:rPr lang="en-US"/>
               <a:t>Click to edit Master text styles</a:t>
             </a:r>
           </a:p>
           <a:p>
             <a:pPr lvl="1"/>
             <a:r>
-              <a:rPr lang="en-US" smtClean="0"/>
+              <a:rPr lang="en-US"/>
               <a:t>Second level</a:t>
             </a:r>
           </a:p>
           <a:p>
             <a:pPr lvl="2"/>
             <a:r>
-              <a:rPr lang="en-US" smtClean="0"/>
+              <a:rPr lang="en-US"/>
               <a:t>Third level</a:t>
             </a:r>
           </a:p>
           <a:p>
             <a:pPr lvl="3"/>
             <a:r>
-              <a:rPr lang="en-US" smtClean="0"/>
+              <a:rPr lang="en-US"/>
               <a:t>Fourth level</a:t>
             </a:r>
           </a:p>
           <a:p>
             <a:pPr lvl="4"/>
             <a:r>
-              <a:rPr lang="en-US" smtClean="0"/>
+              <a:rPr lang="en-US"/>
               <a:t>Fifth level</a:t>
             </a:r>
-            <a:endParaRPr lang="en-US"/>
           </a:p>
         </p:txBody>
       </p:sp>
@@ -820,7 +826,7 @@
           <a:p>
             <a:fld id="{5BCAD085-E8A6-8845-BD4E-CB4CCA059FC4}" type="datetimeFigureOut">
               <a:rPr lang="en-US" smtClean="0"/>
-              <a:t>1/27/13</a:t>
+              <a:t>3/13/2026</a:t>
             </a:fld>
             <a:endParaRPr lang="en-US"/>
           </a:p>
@@ -923,10 +929,9 @@
           </a:lstStyle>
           <a:p>
             <a:r>
-              <a:rPr lang="en-US" smtClean="0"/>
+              <a:rPr lang="en-US"/>
               <a:t>Click to edit Master title style</a:t>
             </a:r>
-            <a:endParaRPr lang="en-US"/>
           </a:p>
         </p:txBody>
       </p:sp>
@@ -1043,7 +1048,7 @@
           <a:p>
             <a:pPr lvl="0"/>
             <a:r>
-              <a:rPr lang="en-US" smtClean="0"/>
+              <a:rPr lang="en-US"/>
               <a:t>Click to edit Master text styles</a:t>
             </a:r>
           </a:p>
@@ -1066,7 +1071,7 @@
           <a:p>
             <a:fld id="{5BCAD085-E8A6-8845-BD4E-CB4CCA059FC4}" type="datetimeFigureOut">
               <a:rPr lang="en-US" smtClean="0"/>
-              <a:t>1/27/13</a:t>
+              <a:t>3/13/2026</a:t>
             </a:fld>
             <a:endParaRPr lang="en-US"/>
           </a:p>
@@ -1160,10 +1165,9 @@
           <a:lstStyle/>
           <a:p>
             <a:r>
-              <a:rPr lang="en-US" smtClean="0"/>
+              <a:rPr lang="en-US"/>
               <a:t>Click to edit Master title style</a:t>
             </a:r>
-            <a:endParaRPr lang="en-US"/>
           </a:p>
         </p:txBody>
       </p:sp>
@@ -1217,38 +1221,37 @@
           <a:p>
             <a:pPr lvl="0"/>
             <a:r>
-              <a:rPr lang="en-US" smtClean="0"/>
+              <a:rPr lang="en-US"/>
               <a:t>Click to edit Master text styles</a:t>
             </a:r>
           </a:p>
           <a:p>
             <a:pPr lvl="1"/>
             <a:r>
-              <a:rPr lang="en-US" smtClean="0"/>
+              <a:rPr lang="en-US"/>
               <a:t>Second level</a:t>
             </a:r>
           </a:p>
           <a:p>
             <a:pPr lvl="2"/>
             <a:r>
-              <a:rPr lang="en-US" smtClean="0"/>
+              <a:rPr lang="en-US"/>
               <a:t>Third level</a:t>
             </a:r>
           </a:p>
           <a:p>
             <a:pPr lvl="3"/>
             <a:r>
-              <a:rPr lang="en-US" smtClean="0"/>
+              <a:rPr lang="en-US"/>
               <a:t>Fourth level</a:t>
             </a:r>
           </a:p>
           <a:p>
             <a:pPr lvl="4"/>
             <a:r>
-              <a:rPr lang="en-US" smtClean="0"/>
+              <a:rPr lang="en-US"/>
               <a:t>Fifth level</a:t>
             </a:r>
-            <a:endParaRPr lang="en-US"/>
           </a:p>
         </p:txBody>
       </p:sp>
@@ -1302,38 +1305,37 @@
           <a:p>
             <a:pPr lvl="0"/>
             <a:r>
-              <a:rPr lang="en-US" smtClean="0"/>
+              <a:rPr lang="en-US"/>
               <a:t>Click to edit Master text styles</a:t>
             </a:r>
           </a:p>
           <a:p>
             <a:pPr lvl="1"/>
             <a:r>
-              <a:rPr lang="en-US" smtClean="0"/>
+              <a:rPr lang="en-US"/>
               <a:t>Second level</a:t>
             </a:r>
           </a:p>
           <a:p>
             <a:pPr lvl="2"/>
             <a:r>
-              <a:rPr lang="en-US" smtClean="0"/>
+              <a:rPr lang="en-US"/>
               <a:t>Third level</a:t>
             </a:r>
           </a:p>
           <a:p>
             <a:pPr lvl="3"/>
             <a:r>
-              <a:rPr lang="en-US" smtClean="0"/>
+              <a:rPr lang="en-US"/>
               <a:t>Fourth level</a:t>
             </a:r>
           </a:p>
           <a:p>
             <a:pPr lvl="4"/>
             <a:r>
-              <a:rPr lang="en-US" smtClean="0"/>
+              <a:rPr lang="en-US"/>
               <a:t>Fifth level</a:t>
             </a:r>
-            <a:endParaRPr lang="en-US"/>
           </a:p>
         </p:txBody>
       </p:sp>
@@ -1354,7 +1356,7 @@
           <a:p>
             <a:fld id="{5BCAD085-E8A6-8845-BD4E-CB4CCA059FC4}" type="datetimeFigureOut">
               <a:rPr lang="en-US" smtClean="0"/>
-              <a:t>1/27/13</a:t>
+              <a:t>3/13/2026</a:t>
             </a:fld>
             <a:endParaRPr lang="en-US"/>
           </a:p>
@@ -1452,10 +1454,9 @@
           </a:lstStyle>
           <a:p>
             <a:r>
-              <a:rPr lang="en-US" smtClean="0"/>
+              <a:rPr lang="en-US"/>
               <a:t>Click to edit Master title style</a:t>
             </a:r>
-            <a:endParaRPr lang="en-US"/>
           </a:p>
         </p:txBody>
       </p:sp>
@@ -1518,7 +1519,7 @@
           <a:p>
             <a:pPr lvl="0"/>
             <a:r>
-              <a:rPr lang="en-US" smtClean="0"/>
+              <a:rPr lang="en-US"/>
               <a:t>Click to edit Master text styles</a:t>
             </a:r>
           </a:p>
@@ -1574,38 +1575,37 @@
           <a:p>
             <a:pPr lvl="0"/>
             <a:r>
-              <a:rPr lang="en-US" smtClean="0"/>
+              <a:rPr lang="en-US"/>
               <a:t>Click to edit Master text styles</a:t>
             </a:r>
           </a:p>
           <a:p>
             <a:pPr lvl="1"/>
             <a:r>
-              <a:rPr lang="en-US" smtClean="0"/>
+              <a:rPr lang="en-US"/>
               <a:t>Second level</a:t>
             </a:r>
           </a:p>
           <a:p>
             <a:pPr lvl="2"/>
             <a:r>
-              <a:rPr lang="en-US" smtClean="0"/>
+              <a:rPr lang="en-US"/>
               <a:t>Third level</a:t>
             </a:r>
           </a:p>
           <a:p>
             <a:pPr lvl="3"/>
             <a:r>
-              <a:rPr lang="en-US" smtClean="0"/>
+              <a:rPr lang="en-US"/>
               <a:t>Fourth level</a:t>
             </a:r>
           </a:p>
           <a:p>
             <a:pPr lvl="4"/>
             <a:r>
-              <a:rPr lang="en-US" smtClean="0"/>
+              <a:rPr lang="en-US"/>
               <a:t>Fifth level</a:t>
             </a:r>
-            <a:endParaRPr lang="en-US"/>
           </a:p>
         </p:txBody>
       </p:sp>
@@ -1668,7 +1668,7 @@
           <a:p>
             <a:pPr lvl="0"/>
             <a:r>
-              <a:rPr lang="en-US" smtClean="0"/>
+              <a:rPr lang="en-US"/>
               <a:t>Click to edit Master text styles</a:t>
             </a:r>
           </a:p>
@@ -1724,38 +1724,37 @@
           <a:p>
             <a:pPr lvl="0"/>
             <a:r>
-              <a:rPr lang="en-US" smtClean="0"/>
+              <a:rPr lang="en-US"/>
               <a:t>Click to edit Master text styles</a:t>
             </a:r>
           </a:p>
           <a:p>
             <a:pPr lvl="1"/>
             <a:r>
-              <a:rPr lang="en-US" smtClean="0"/>
+              <a:rPr lang="en-US"/>
               <a:t>Second level</a:t>
             </a:r>
           </a:p>
           <a:p>
             <a:pPr lvl="2"/>
             <a:r>
-              <a:rPr lang="en-US" smtClean="0"/>
+              <a:rPr lang="en-US"/>
               <a:t>Third level</a:t>
             </a:r>
           </a:p>
           <a:p>
             <a:pPr lvl="3"/>
             <a:r>
-              <a:rPr lang="en-US" smtClean="0"/>
+              <a:rPr lang="en-US"/>
               <a:t>Fourth level</a:t>
             </a:r>
           </a:p>
           <a:p>
             <a:pPr lvl="4"/>
             <a:r>
-              <a:rPr lang="en-US" smtClean="0"/>
+              <a:rPr lang="en-US"/>
               <a:t>Fifth level</a:t>
             </a:r>
-            <a:endParaRPr lang="en-US"/>
           </a:p>
         </p:txBody>
       </p:sp>
@@ -1776,7 +1775,7 @@
           <a:p>
             <a:fld id="{5BCAD085-E8A6-8845-BD4E-CB4CCA059FC4}" type="datetimeFigureOut">
               <a:rPr lang="en-US" smtClean="0"/>
-              <a:t>1/27/13</a:t>
+              <a:t>3/13/2026</a:t>
             </a:fld>
             <a:endParaRPr lang="en-US"/>
           </a:p>
@@ -1870,10 +1869,9 @@
           <a:lstStyle/>
           <a:p>
             <a:r>
-              <a:rPr lang="en-US" smtClean="0"/>
+              <a:rPr lang="en-US"/>
               <a:t>Click to edit Master title style</a:t>
             </a:r>
-            <a:endParaRPr lang="en-US"/>
           </a:p>
         </p:txBody>
       </p:sp>
@@ -1894,7 +1892,7 @@
           <a:p>
             <a:fld id="{5BCAD085-E8A6-8845-BD4E-CB4CCA059FC4}" type="datetimeFigureOut">
               <a:rPr lang="en-US" smtClean="0"/>
-              <a:t>1/27/13</a:t>
+              <a:t>3/13/2026</a:t>
             </a:fld>
             <a:endParaRPr lang="en-US"/>
           </a:p>
@@ -1989,7 +1987,7 @@
           <a:p>
             <a:fld id="{5BCAD085-E8A6-8845-BD4E-CB4CCA059FC4}" type="datetimeFigureOut">
               <a:rPr lang="en-US" smtClean="0"/>
-              <a:t>1/27/13</a:t>
+              <a:t>3/13/2026</a:t>
             </a:fld>
             <a:endParaRPr lang="en-US"/>
           </a:p>
@@ -2092,10 +2090,9 @@
           </a:lstStyle>
           <a:p>
             <a:r>
-              <a:rPr lang="en-US" smtClean="0"/>
+              <a:rPr lang="en-US"/>
               <a:t>Click to edit Master title style</a:t>
             </a:r>
-            <a:endParaRPr lang="en-US"/>
           </a:p>
         </p:txBody>
       </p:sp>
@@ -2149,38 +2146,37 @@
           <a:p>
             <a:pPr lvl="0"/>
             <a:r>
-              <a:rPr lang="en-US" smtClean="0"/>
+              <a:rPr lang="en-US"/>
               <a:t>Click to edit Master text styles</a:t>
             </a:r>
           </a:p>
           <a:p>
             <a:pPr lvl="1"/>
             <a:r>
-              <a:rPr lang="en-US" smtClean="0"/>
+              <a:rPr lang="en-US"/>
               <a:t>Second level</a:t>
             </a:r>
           </a:p>
           <a:p>
             <a:pPr lvl="2"/>
             <a:r>
-              <a:rPr lang="en-US" smtClean="0"/>
+              <a:rPr lang="en-US"/>
               <a:t>Third level</a:t>
             </a:r>
           </a:p>
           <a:p>
             <a:pPr lvl="3"/>
             <a:r>
-              <a:rPr lang="en-US" smtClean="0"/>
+              <a:rPr lang="en-US"/>
               <a:t>Fourth level</a:t>
             </a:r>
           </a:p>
           <a:p>
             <a:pPr lvl="4"/>
             <a:r>
-              <a:rPr lang="en-US" smtClean="0"/>
+              <a:rPr lang="en-US"/>
               <a:t>Fifth level</a:t>
             </a:r>
-            <a:endParaRPr lang="en-US"/>
           </a:p>
         </p:txBody>
       </p:sp>
@@ -2243,7 +2239,7 @@
           <a:p>
             <a:pPr lvl="0"/>
             <a:r>
-              <a:rPr lang="en-US" smtClean="0"/>
+              <a:rPr lang="en-US"/>
               <a:t>Click to edit Master text styles</a:t>
             </a:r>
           </a:p>
@@ -2266,7 +2262,7 @@
           <a:p>
             <a:fld id="{5BCAD085-E8A6-8845-BD4E-CB4CCA059FC4}" type="datetimeFigureOut">
               <a:rPr lang="en-US" smtClean="0"/>
-              <a:t>1/27/13</a:t>
+              <a:t>3/13/2026</a:t>
             </a:fld>
             <a:endParaRPr lang="en-US"/>
           </a:p>
@@ -2369,10 +2365,9 @@
           </a:lstStyle>
           <a:p>
             <a:r>
-              <a:rPr lang="en-US" smtClean="0"/>
+              <a:rPr lang="en-US"/>
               <a:t>Click to edit Master title style</a:t>
             </a:r>
-            <a:endParaRPr lang="en-US"/>
           </a:p>
         </p:txBody>
       </p:sp>
@@ -2496,7 +2491,7 @@
           <a:p>
             <a:pPr lvl="0"/>
             <a:r>
-              <a:rPr lang="en-US" smtClean="0"/>
+              <a:rPr lang="en-US"/>
               <a:t>Click to edit Master text styles</a:t>
             </a:r>
           </a:p>
@@ -2519,7 +2514,7 @@
           <a:p>
             <a:fld id="{5BCAD085-E8A6-8845-BD4E-CB4CCA059FC4}" type="datetimeFigureOut">
               <a:rPr lang="en-US" smtClean="0"/>
-              <a:t>1/27/13</a:t>
+              <a:t>3/13/2026</a:t>
             </a:fld>
             <a:endParaRPr lang="en-US"/>
           </a:p>
@@ -2628,10 +2623,9 @@
           <a:lstStyle/>
           <a:p>
             <a:r>
-              <a:rPr lang="en-US" smtClean="0"/>
+              <a:rPr lang="en-US"/>
               <a:t>Click to edit Master title style</a:t>
             </a:r>
-            <a:endParaRPr lang="en-US"/>
           </a:p>
         </p:txBody>
       </p:sp>
@@ -2662,38 +2656,37 @@
           <a:p>
             <a:pPr lvl="0"/>
             <a:r>
-              <a:rPr lang="en-US" smtClean="0"/>
+              <a:rPr lang="en-US"/>
               <a:t>Click to edit Master text styles</a:t>
             </a:r>
           </a:p>
           <a:p>
             <a:pPr lvl="1"/>
             <a:r>
-              <a:rPr lang="en-US" smtClean="0"/>
+              <a:rPr lang="en-US"/>
               <a:t>Second level</a:t>
             </a:r>
           </a:p>
           <a:p>
             <a:pPr lvl="2"/>
             <a:r>
-              <a:rPr lang="en-US" smtClean="0"/>
+              <a:rPr lang="en-US"/>
               <a:t>Third level</a:t>
             </a:r>
           </a:p>
           <a:p>
             <a:pPr lvl="3"/>
             <a:r>
-              <a:rPr lang="en-US" smtClean="0"/>
+              <a:rPr lang="en-US"/>
               <a:t>Fourth level</a:t>
             </a:r>
           </a:p>
           <a:p>
             <a:pPr lvl="4"/>
             <a:r>
-              <a:rPr lang="en-US" smtClean="0"/>
+              <a:rPr lang="en-US"/>
               <a:t>Fifth level</a:t>
             </a:r>
-            <a:endParaRPr lang="en-US"/>
           </a:p>
         </p:txBody>
       </p:sp>
@@ -2732,7 +2725,7 @@
           <a:p>
             <a:fld id="{5BCAD085-E8A6-8845-BD4E-CB4CCA059FC4}" type="datetimeFigureOut">
               <a:rPr lang="en-US" smtClean="0"/>
-              <a:t>1/27/13</a:t>
+              <a:t>3/13/2026</a:t>
             </a:fld>
             <a:endParaRPr lang="en-US"/>
           </a:p>
@@ -3091,7 +3084,7 @@
 </file>
 
 <file path=ppt/slides/slide1.xml><?xml version="1.0" encoding="utf-8"?>
-<p:sld xmlns:a="http://schemas.openxmlformats.org/drawingml/2006/main" xmlns:p="http://schemas.openxmlformats.org/presentationml/2006/main" xmlns:r="http://schemas.openxmlformats.org/officeDocument/2006/relationships">
+<p:sld xmlns:a="http://schemas.openxmlformats.org/drawingml/2006/main" xmlns:r="http://schemas.openxmlformats.org/officeDocument/2006/relationships" xmlns:p="http://schemas.openxmlformats.org/presentationml/2006/main">
   <p:cSld>
     <p:spTree>
       <p:nvGrpSpPr>
@@ -3099,7 +3092,14 @@
         <p:cNvGrpSpPr/>
         <p:nvPr/>
       </p:nvGrpSpPr>
-      <p:grpSpPr/>
+      <p:grpSpPr>
+        <a:xfrm>
+          <a:off x="0" y="0"/>
+          <a:ext cx="0" cy="0"/>
+          <a:chOff x="0" y="0"/>
+          <a:chExt cx="0" cy="0"/>
+        </a:xfrm>
+      </p:grpSpPr>
       <p:sp>
         <p:nvSpPr>
           <p:cNvPr id="2" name="Title 1"/>
@@ -3110,48 +3110,312 @@
             <p:ph type="title"/>
           </p:nvPr>
         </p:nvSpPr>
-        <p:spPr/>
+        <p:spPr>
+          <a:xfrm>
+            <a:off x="555522" y="1321109"/>
+            <a:ext cx="8229600" cy="1143000"/>
+          </a:xfrm>
+        </p:spPr>
         <p:txBody>
           <a:bodyPr/>
           <a:lstStyle/>
           <a:p>
             <a:r>
-              <a:t>Title Slide</a:t>
-            </a:r>
-          </a:p>
-        </p:txBody>
-      </p:sp>
-      <p:sp>
-        <p:nvSpPr>
-          <p:cNvPr id="3" name="Content Placeholder 2"/>
-          <p:cNvSpPr>
-            <a:spLocks noGrp="1"/>
-          </p:cNvSpPr>
+              <a:rPr lang="en-US" b="1" dirty="0"/>
+              <a:t>Automated Backup Web Manager</a:t>
+            </a:r>
+            <a:endParaRPr lang="en-US" dirty="0"/>
+          </a:p>
+        </p:txBody>
+      </p:sp>
+      <p:graphicFrame>
+        <p:nvGraphicFramePr>
+          <p:cNvPr id="10" name="Content Placeholder 9">
+            <a:extLst>
+              <a:ext uri="{FF2B5EF4-FFF2-40B4-BE49-F238E27FC236}">
+                <a16:creationId xmlns:a16="http://schemas.microsoft.com/office/drawing/2014/main" id="{8C40C0FE-0F82-5404-A949-61983F302F76}"/>
+              </a:ext>
+            </a:extLst>
+          </p:cNvPr>
+          <p:cNvGraphicFramePr>
+            <a:graphicFrameLocks noGrp="1"/>
+          </p:cNvGraphicFramePr>
           <p:nvPr>
             <p:ph idx="1"/>
-          </p:nvPr>
-        </p:nvSpPr>
-        <p:spPr/>
-        <p:txBody>
-          <a:bodyPr/>
-          <a:lstStyle/>
-          <a:p>
-            <a:r>
-              <a:t>Automated Backup Web Manager</a:t>
-            </a:r>
-          </a:p>
-          <a:p>
-            <a:r>
-              <a:t>Linux Based Project</a:t>
-            </a:r>
-          </a:p>
-          <a:p>
-            <a:r>
-              <a:t>Seminar Presentation</a:t>
-            </a:r>
-          </a:p>
-        </p:txBody>
-      </p:sp>
+            <p:extLst>
+              <p:ext uri="{D42A27DB-BD31-4B8C-83A1-F6EECF244321}">
+                <p14:modId xmlns:p14="http://schemas.microsoft.com/office/powerpoint/2010/main" val="1050120582"/>
+              </p:ext>
+            </p:extLst>
+          </p:nvPr>
+        </p:nvGraphicFramePr>
+        <p:xfrm>
+          <a:off x="1605116" y="3429000"/>
+          <a:ext cx="5953432" cy="1752600"/>
+        </p:xfrm>
+        <a:graphic>
+          <a:graphicData uri="http://schemas.openxmlformats.org/drawingml/2006/table">
+            <a:tbl>
+              <a:tblPr firstRow="1" bandRow="1">
+                <a:tableStyleId>{5C22544A-7EE6-4342-B048-85BDC9FD1C3A}</a:tableStyleId>
+              </a:tblPr>
+              <a:tblGrid>
+                <a:gridCol w="2976716">
+                  <a:extLst>
+                    <a:ext uri="{9D8B030D-6E8A-4147-A177-3AD203B41FA5}">
+                      <a16:colId xmlns:a16="http://schemas.microsoft.com/office/drawing/2014/main" val="89331077"/>
+                    </a:ext>
+                  </a:extLst>
+                </a:gridCol>
+                <a:gridCol w="2976716">
+                  <a:extLst>
+                    <a:ext uri="{9D8B030D-6E8A-4147-A177-3AD203B41FA5}">
+                      <a16:colId xmlns:a16="http://schemas.microsoft.com/office/drawing/2014/main" val="4265277944"/>
+                    </a:ext>
+                  </a:extLst>
+                </a:gridCol>
+              </a:tblGrid>
+              <a:tr h="584200">
+                <a:tc>
+                  <a:txBody>
+                    <a:bodyPr/>
+                    <a:lstStyle/>
+                    <a:p>
+                      <a:pPr algn="ctr">
+                        <a:lnSpc>
+                          <a:spcPct val="115000"/>
+                        </a:lnSpc>
+                        <a:spcAft>
+                          <a:spcPts val="800"/>
+                        </a:spcAft>
+                        <a:buNone/>
+                      </a:pPr>
+                      <a:r>
+                        <a:rPr lang="en-US" sz="1100" b="1" kern="0" dirty="0">
+                          <a:solidFill>
+                            <a:srgbClr val="000000"/>
+                          </a:solidFill>
+                          <a:effectLst/>
+                          <a:latin typeface="Cambria" panose="02040503050406030204" pitchFamily="18" charset="0"/>
+                          <a:ea typeface="Times New Roman" panose="02020603050405020304" pitchFamily="18" charset="0"/>
+                          <a:cs typeface="Gautami" panose="020B0502040204020203" pitchFamily="34" charset="0"/>
+                        </a:rPr>
+                        <a:t>M VARSHITH REDDY</a:t>
+                      </a:r>
+                      <a:endParaRPr lang="en-US" sz="1200" kern="100" dirty="0">
+                        <a:effectLst/>
+                        <a:latin typeface="Calibri" panose="020F0502020204030204" pitchFamily="34" charset="0"/>
+                        <a:ea typeface="Calibri" panose="020F0502020204030204" pitchFamily="34" charset="0"/>
+                        <a:cs typeface="Gautami" panose="020B0502040204020203" pitchFamily="34" charset="0"/>
+                      </a:endParaRPr>
+                    </a:p>
+                  </a:txBody>
+                  <a:tcPr marL="68580" marR="68580" marT="0" marB="0" anchor="ctr"/>
+                </a:tc>
+                <a:tc>
+                  <a:txBody>
+                    <a:bodyPr/>
+                    <a:lstStyle/>
+                    <a:p>
+                      <a:pPr algn="ctr">
+                        <a:lnSpc>
+                          <a:spcPct val="115000"/>
+                        </a:lnSpc>
+                        <a:spcAft>
+                          <a:spcPts val="800"/>
+                        </a:spcAft>
+                        <a:buNone/>
+                      </a:pPr>
+                      <a:r>
+                        <a:rPr lang="en-US" sz="1100" b="1" kern="0" dirty="0">
+                          <a:solidFill>
+                            <a:srgbClr val="000000"/>
+                          </a:solidFill>
+                          <a:effectLst/>
+                          <a:latin typeface="Gautami" panose="020B0502040204020203" pitchFamily="34" charset="0"/>
+                          <a:ea typeface="Times New Roman" panose="02020603050405020304" pitchFamily="18" charset="0"/>
+                          <a:cs typeface="Gautami" panose="020B0502040204020203" pitchFamily="34" charset="0"/>
+                        </a:rPr>
+                        <a:t>SHASHIDHAR</a:t>
+                      </a:r>
+                      <a:endParaRPr lang="en-US" sz="1200" kern="100" dirty="0">
+                        <a:effectLst/>
+                        <a:latin typeface="Calibri" panose="020F0502020204030204" pitchFamily="34" charset="0"/>
+                        <a:ea typeface="Calibri" panose="020F0502020204030204" pitchFamily="34" charset="0"/>
+                        <a:cs typeface="Gautami" panose="020B0502040204020203" pitchFamily="34" charset="0"/>
+                      </a:endParaRPr>
+                    </a:p>
+                  </a:txBody>
+                  <a:tcPr marL="68580" marR="68580" marT="0" marB="0" anchor="ctr"/>
+                </a:tc>
+                <a:extLst>
+                  <a:ext uri="{0D108BD9-81ED-4DB2-BD59-A6C34878D82A}">
+                    <a16:rowId xmlns:a16="http://schemas.microsoft.com/office/drawing/2014/main" val="212069062"/>
+                  </a:ext>
+                </a:extLst>
+              </a:tr>
+              <a:tr h="584200">
+                <a:tc>
+                  <a:txBody>
+                    <a:bodyPr/>
+                    <a:lstStyle/>
+                    <a:p>
+                      <a:pPr algn="ctr">
+                        <a:lnSpc>
+                          <a:spcPct val="115000"/>
+                        </a:lnSpc>
+                        <a:spcAft>
+                          <a:spcPts val="800"/>
+                        </a:spcAft>
+                        <a:buNone/>
+                      </a:pPr>
+                      <a:r>
+                        <a:rPr lang="en-US" sz="1100" b="1" kern="0" dirty="0">
+                          <a:solidFill>
+                            <a:srgbClr val="000000"/>
+                          </a:solidFill>
+                          <a:effectLst/>
+                          <a:latin typeface="Cambria" panose="02040503050406030204" pitchFamily="18" charset="0"/>
+                          <a:ea typeface="Times New Roman" panose="02020603050405020304" pitchFamily="18" charset="0"/>
+                          <a:cs typeface="Gautami" panose="020B0502040204020203" pitchFamily="34" charset="0"/>
+                        </a:rPr>
+                        <a:t>CYBER SECURITY STUDENT</a:t>
+                      </a:r>
+                      <a:endParaRPr lang="en-US" sz="1200" kern="100" dirty="0">
+                        <a:effectLst/>
+                        <a:latin typeface="Calibri" panose="020F0502020204030204" pitchFamily="34" charset="0"/>
+                        <a:ea typeface="Calibri" panose="020F0502020204030204" pitchFamily="34" charset="0"/>
+                        <a:cs typeface="Gautami" panose="020B0502040204020203" pitchFamily="34" charset="0"/>
+                      </a:endParaRPr>
+                    </a:p>
+                  </a:txBody>
+                  <a:tcPr marL="68580" marR="68580" marT="0" marB="0" anchor="ctr"/>
+                </a:tc>
+                <a:tc>
+                  <a:txBody>
+                    <a:bodyPr/>
+                    <a:lstStyle/>
+                    <a:p>
+                      <a:pPr algn="ctr">
+                        <a:lnSpc>
+                          <a:spcPct val="115000"/>
+                        </a:lnSpc>
+                        <a:spcAft>
+                          <a:spcPts val="800"/>
+                        </a:spcAft>
+                        <a:buNone/>
+                      </a:pPr>
+                      <a:r>
+                        <a:rPr lang="en-US" sz="1100" b="1" kern="0" dirty="0">
+                          <a:solidFill>
+                            <a:srgbClr val="000000"/>
+                          </a:solidFill>
+                          <a:effectLst/>
+                          <a:latin typeface="Gautami" panose="020B0502040204020203" pitchFamily="34" charset="0"/>
+                          <a:ea typeface="Times New Roman" panose="02020603050405020304" pitchFamily="18" charset="0"/>
+                          <a:cs typeface="Gautami" panose="020B0502040204020203" pitchFamily="34" charset="0"/>
+                        </a:rPr>
+                        <a:t>CYBER SECURITY MENTOR</a:t>
+                      </a:r>
+                      <a:endParaRPr lang="en-US" sz="1200" kern="100" dirty="0">
+                        <a:effectLst/>
+                        <a:latin typeface="Calibri" panose="020F0502020204030204" pitchFamily="34" charset="0"/>
+                        <a:ea typeface="Calibri" panose="020F0502020204030204" pitchFamily="34" charset="0"/>
+                        <a:cs typeface="Gautami" panose="020B0502040204020203" pitchFamily="34" charset="0"/>
+                      </a:endParaRPr>
+                    </a:p>
+                  </a:txBody>
+                  <a:tcPr marL="68580" marR="68580" marT="0" marB="0" anchor="ctr"/>
+                </a:tc>
+                <a:extLst>
+                  <a:ext uri="{0D108BD9-81ED-4DB2-BD59-A6C34878D82A}">
+                    <a16:rowId xmlns:a16="http://schemas.microsoft.com/office/drawing/2014/main" val="2345099819"/>
+                  </a:ext>
+                </a:extLst>
+              </a:tr>
+              <a:tr h="584200">
+                <a:tc>
+                  <a:txBody>
+                    <a:bodyPr/>
+                    <a:lstStyle/>
+                    <a:p>
+                      <a:pPr algn="ctr">
+                        <a:lnSpc>
+                          <a:spcPct val="115000"/>
+                        </a:lnSpc>
+                        <a:spcAft>
+                          <a:spcPts val="800"/>
+                        </a:spcAft>
+                        <a:buNone/>
+                      </a:pPr>
+                      <a:r>
+                        <a:rPr lang="en-US" sz="1100" b="1" kern="0">
+                          <a:solidFill>
+                            <a:srgbClr val="000000"/>
+                          </a:solidFill>
+                          <a:effectLst/>
+                          <a:latin typeface="Cambria" panose="02040503050406030204" pitchFamily="18" charset="0"/>
+                          <a:ea typeface="Times New Roman" panose="02020603050405020304" pitchFamily="18" charset="0"/>
+                          <a:cs typeface="Gautami" panose="020B0502040204020203" pitchFamily="34" charset="0"/>
+                        </a:rPr>
+                        <a:t>9390542631</a:t>
+                      </a:r>
+                      <a:endParaRPr lang="en-US" sz="1200" kern="100">
+                        <a:effectLst/>
+                        <a:latin typeface="Calibri" panose="020F0502020204030204" pitchFamily="34" charset="0"/>
+                        <a:ea typeface="Calibri" panose="020F0502020204030204" pitchFamily="34" charset="0"/>
+                        <a:cs typeface="Gautami" panose="020B0502040204020203" pitchFamily="34" charset="0"/>
+                      </a:endParaRPr>
+                    </a:p>
+                  </a:txBody>
+                  <a:tcPr marL="68580" marR="68580" marT="0" marB="0" anchor="ctr"/>
+                </a:tc>
+                <a:tc>
+                  <a:txBody>
+                    <a:bodyPr/>
+                    <a:lstStyle/>
+                    <a:p>
+                      <a:pPr algn="ctr">
+                        <a:lnSpc>
+                          <a:spcPct val="115000"/>
+                        </a:lnSpc>
+                        <a:spcAft>
+                          <a:spcPts val="800"/>
+                        </a:spcAft>
+                        <a:buNone/>
+                      </a:pPr>
+                      <a:r>
+                        <a:rPr lang="en-US" sz="1100" b="1" kern="0" dirty="0">
+                          <a:solidFill>
+                            <a:srgbClr val="000000"/>
+                          </a:solidFill>
+                          <a:effectLst/>
+                          <a:latin typeface="Gautami" panose="020B0502040204020203" pitchFamily="34" charset="0"/>
+                          <a:ea typeface="Times New Roman" panose="02020603050405020304" pitchFamily="18" charset="0"/>
+                          <a:cs typeface="Gautami" panose="020B0502040204020203" pitchFamily="34" charset="0"/>
+                        </a:rPr>
+                        <a:t>9603343287</a:t>
+                      </a:r>
+                      <a:endParaRPr lang="en-US" sz="1200" kern="100" dirty="0">
+                        <a:effectLst/>
+                        <a:latin typeface="Calibri" panose="020F0502020204030204" pitchFamily="34" charset="0"/>
+                        <a:ea typeface="Calibri" panose="020F0502020204030204" pitchFamily="34" charset="0"/>
+                        <a:cs typeface="Gautami" panose="020B0502040204020203" pitchFamily="34" charset="0"/>
+                      </a:endParaRPr>
+                    </a:p>
+                  </a:txBody>
+                  <a:tcPr marL="68580" marR="68580" marT="0" marB="0" anchor="ctr"/>
+                </a:tc>
+                <a:extLst>
+                  <a:ext uri="{0D108BD9-81ED-4DB2-BD59-A6C34878D82A}">
+                    <a16:rowId xmlns:a16="http://schemas.microsoft.com/office/drawing/2014/main" val="1155618885"/>
+                  </a:ext>
+                </a:extLst>
+              </a:tr>
+            </a:tbl>
+          </a:graphicData>
+        </a:graphic>
+      </p:graphicFrame>
     </p:spTree>
   </p:cSld>
   <p:clrMapOvr>
@@ -3161,7 +3425,7 @@
 </file>
 
 <file path=ppt/slides/slide10.xml><?xml version="1.0" encoding="utf-8"?>
-<p:sld xmlns:a="http://schemas.openxmlformats.org/drawingml/2006/main" xmlns:p="http://schemas.openxmlformats.org/presentationml/2006/main" xmlns:r="http://schemas.openxmlformats.org/officeDocument/2006/relationships">
+<p:sld xmlns:a="http://schemas.openxmlformats.org/drawingml/2006/main" xmlns:r="http://schemas.openxmlformats.org/officeDocument/2006/relationships" xmlns:p="http://schemas.openxmlformats.org/presentationml/2006/main">
   <p:cSld>
     <p:spTree>
       <p:nvGrpSpPr>
@@ -3169,7 +3433,14 @@
         <p:cNvGrpSpPr/>
         <p:nvPr/>
       </p:nvGrpSpPr>
-      <p:grpSpPr/>
+      <p:grpSpPr>
+        <a:xfrm>
+          <a:off x="0" y="0"/>
+          <a:ext cx="0" cy="0"/>
+          <a:chOff x="0" y="0"/>
+          <a:chExt cx="0" cy="0"/>
+        </a:xfrm>
+      </p:grpSpPr>
       <p:sp>
         <p:nvSpPr>
           <p:cNvPr id="2" name="Title 1"/>
@@ -3180,13 +3451,21 @@
             <p:ph type="title"/>
           </p:nvPr>
         </p:nvSpPr>
-        <p:spPr/>
-        <p:txBody>
-          <a:bodyPr/>
-          <a:lstStyle/>
-          <a:p>
-            <a:r>
-              <a:t>Backup Process</a:t>
+        <p:spPr>
+          <a:xfrm>
+            <a:off x="457200" y="274638"/>
+            <a:ext cx="8229600" cy="905233"/>
+          </a:xfrm>
+        </p:spPr>
+        <p:txBody>
+          <a:bodyPr>
+            <a:normAutofit/>
+          </a:bodyPr>
+          <a:lstStyle/>
+          <a:p>
+            <a:r>
+              <a:rPr sz="4000" dirty="0"/>
+              <a:t>Future Enhancements</a:t>
             </a:r>
           </a:p>
         </p:txBody>
@@ -3201,34 +3480,57 @@
             <p:ph idx="1"/>
           </p:nvPr>
         </p:nvSpPr>
-        <p:spPr/>
-        <p:txBody>
-          <a:bodyPr/>
-          <a:lstStyle/>
-          <a:p>
-            <a:r>
-              <a:t>1. Select directory</a:t>
-            </a:r>
-          </a:p>
-          <a:p>
-            <a:r>
-              <a:t>2. Rsync copies files</a:t>
-            </a:r>
-          </a:p>
-          <a:p>
-            <a:r>
-              <a:t>3. Tar compresses files</a:t>
-            </a:r>
-          </a:p>
-          <a:p>
-            <a:r>
-              <a:t>4. Backup stored in backups folder</a:t>
-            </a:r>
-          </a:p>
-          <a:p>
-            <a:r>
-              <a:t>5. Log file updated</a:t>
-            </a:r>
+        <p:spPr>
+          <a:xfrm>
+            <a:off x="457200" y="1337188"/>
+            <a:ext cx="8229600" cy="4788976"/>
+          </a:xfrm>
+        </p:spPr>
+        <p:txBody>
+          <a:bodyPr>
+            <a:normAutofit/>
+          </a:bodyPr>
+          <a:lstStyle/>
+          <a:p>
+            <a:pPr marL="0" indent="0">
+              <a:lnSpc>
+                <a:spcPct val="150000"/>
+              </a:lnSpc>
+              <a:buNone/>
+            </a:pPr>
+            <a:r>
+              <a:rPr lang="en-US" sz="2400" dirty="0"/>
+              <a:t>• Integration with cloud storage for remote backups</a:t>
+            </a:r>
+            <a:br>
+              <a:rPr lang="en-US" sz="2400" dirty="0"/>
+            </a:br>
+            <a:r>
+              <a:rPr lang="en-US" sz="2400" dirty="0"/>
+              <a:t>• Encryption of backup files for better security</a:t>
+            </a:r>
+            <a:br>
+              <a:rPr lang="en-US" sz="2400" dirty="0"/>
+            </a:br>
+            <a:r>
+              <a:rPr lang="en-US" sz="2400" dirty="0"/>
+              <a:t>• Email notifications for backup status</a:t>
+            </a:r>
+            <a:br>
+              <a:rPr lang="en-US" sz="2400" dirty="0"/>
+            </a:br>
+            <a:r>
+              <a:rPr lang="en-US" sz="2400" dirty="0"/>
+              <a:t>• User authentication for secure web access</a:t>
+            </a:r>
+            <a:br>
+              <a:rPr lang="en-US" sz="2400" dirty="0"/>
+            </a:br>
+            <a:r>
+              <a:rPr lang="en-US" sz="2400" dirty="0"/>
+              <a:t>• Automatic backup restoration feature</a:t>
+            </a:r>
+            <a:endParaRPr sz="2400" dirty="0"/>
           </a:p>
         </p:txBody>
       </p:sp>
@@ -3241,7 +3543,7 @@
 </file>
 
 <file path=ppt/slides/slide11.xml><?xml version="1.0" encoding="utf-8"?>
-<p:sld xmlns:a="http://schemas.openxmlformats.org/drawingml/2006/main" xmlns:p="http://schemas.openxmlformats.org/presentationml/2006/main" xmlns:r="http://schemas.openxmlformats.org/officeDocument/2006/relationships">
+<p:sld xmlns:a="http://schemas.openxmlformats.org/drawingml/2006/main" xmlns:r="http://schemas.openxmlformats.org/officeDocument/2006/relationships" xmlns:p="http://schemas.openxmlformats.org/presentationml/2006/main">
   <p:cSld>
     <p:spTree>
       <p:nvGrpSpPr>
@@ -3249,7 +3551,14 @@
         <p:cNvGrpSpPr/>
         <p:nvPr/>
       </p:nvGrpSpPr>
-      <p:grpSpPr/>
+      <p:grpSpPr>
+        <a:xfrm>
+          <a:off x="0" y="0"/>
+          <a:ext cx="0" cy="0"/>
+          <a:chOff x="0" y="0"/>
+          <a:chExt cx="0" cy="0"/>
+        </a:xfrm>
+      </p:grpSpPr>
       <p:sp>
         <p:nvSpPr>
           <p:cNvPr id="2" name="Title 1"/>
@@ -3260,13 +3569,21 @@
             <p:ph type="title"/>
           </p:nvPr>
         </p:nvSpPr>
-        <p:spPr/>
-        <p:txBody>
-          <a:bodyPr/>
-          <a:lstStyle/>
-          <a:p>
-            <a:r>
-              <a:t>Advantages</a:t>
+        <p:spPr>
+          <a:xfrm>
+            <a:off x="457200" y="274638"/>
+            <a:ext cx="8229600" cy="836407"/>
+          </a:xfrm>
+        </p:spPr>
+        <p:txBody>
+          <a:bodyPr>
+            <a:normAutofit/>
+          </a:bodyPr>
+          <a:lstStyle/>
+          <a:p>
+            <a:r>
+              <a:rPr sz="4000" dirty="0"/>
+              <a:t>Conclusion</a:t>
             </a:r>
           </a:p>
         </p:txBody>
@@ -3281,164 +3598,55 @@
             <p:ph idx="1"/>
           </p:nvPr>
         </p:nvSpPr>
-        <p:spPr/>
-        <p:txBody>
-          <a:bodyPr/>
-          <a:lstStyle/>
-          <a:p>
-            <a:r>
-              <a:t>• Automated backup process</a:t>
-            </a:r>
-          </a:p>
-          <a:p>
-            <a:r>
-              <a:t>• Reduces human errors</a:t>
-            </a:r>
-          </a:p>
-          <a:p>
-            <a:r>
-              <a:t>• Efficient storage with compression</a:t>
-            </a:r>
-          </a:p>
-          <a:p>
-            <a:r>
-              <a:t>• Easy monitoring using web interface</a:t>
-            </a:r>
-          </a:p>
-        </p:txBody>
-      </p:sp>
-    </p:spTree>
-  </p:cSld>
-  <p:clrMapOvr>
-    <a:masterClrMapping/>
-  </p:clrMapOvr>
-</p:sld>
-</file>
-
-<file path=ppt/slides/slide12.xml><?xml version="1.0" encoding="utf-8"?>
-<p:sld xmlns:a="http://schemas.openxmlformats.org/drawingml/2006/main" xmlns:p="http://schemas.openxmlformats.org/presentationml/2006/main" xmlns:r="http://schemas.openxmlformats.org/officeDocument/2006/relationships">
-  <p:cSld>
-    <p:spTree>
-      <p:nvGrpSpPr>
-        <p:cNvPr id="1" name=""/>
-        <p:cNvGrpSpPr/>
-        <p:nvPr/>
-      </p:nvGrpSpPr>
-      <p:grpSpPr/>
-      <p:sp>
-        <p:nvSpPr>
-          <p:cNvPr id="2" name="Title 1"/>
-          <p:cNvSpPr>
-            <a:spLocks noGrp="1"/>
-          </p:cNvSpPr>
-          <p:nvPr>
-            <p:ph type="title"/>
-          </p:nvPr>
-        </p:nvSpPr>
-        <p:spPr/>
-        <p:txBody>
-          <a:bodyPr/>
-          <a:lstStyle/>
-          <a:p>
-            <a:r>
-              <a:t>Future Enhancements</a:t>
-            </a:r>
-          </a:p>
-        </p:txBody>
-      </p:sp>
-      <p:sp>
-        <p:nvSpPr>
-          <p:cNvPr id="3" name="Content Placeholder 2"/>
-          <p:cNvSpPr>
-            <a:spLocks noGrp="1"/>
-          </p:cNvSpPr>
-          <p:nvPr>
-            <p:ph idx="1"/>
-          </p:nvPr>
-        </p:nvSpPr>
-        <p:spPr/>
-        <p:txBody>
-          <a:bodyPr/>
-          <a:lstStyle/>
-          <a:p>
-            <a:r>
-              <a:t>• Cloud backup integration</a:t>
-            </a:r>
-          </a:p>
-          <a:p>
-            <a:r>
-              <a:t>• Backup encryption</a:t>
-            </a:r>
-          </a:p>
-          <a:p>
-            <a:r>
-              <a:t>• Email notifications</a:t>
-            </a:r>
-          </a:p>
-          <a:p>
-            <a:r>
-              <a:t>• User authentication for web interface</a:t>
-            </a:r>
-          </a:p>
-        </p:txBody>
-      </p:sp>
-    </p:spTree>
-  </p:cSld>
-  <p:clrMapOvr>
-    <a:masterClrMapping/>
-  </p:clrMapOvr>
-</p:sld>
-</file>
-
-<file path=ppt/slides/slide13.xml><?xml version="1.0" encoding="utf-8"?>
-<p:sld xmlns:a="http://schemas.openxmlformats.org/drawingml/2006/main" xmlns:p="http://schemas.openxmlformats.org/presentationml/2006/main" xmlns:r="http://schemas.openxmlformats.org/officeDocument/2006/relationships">
-  <p:cSld>
-    <p:spTree>
-      <p:nvGrpSpPr>
-        <p:cNvPr id="1" name=""/>
-        <p:cNvGrpSpPr/>
-        <p:nvPr/>
-      </p:nvGrpSpPr>
-      <p:grpSpPr/>
-      <p:sp>
-        <p:nvSpPr>
-          <p:cNvPr id="2" name="Title 1"/>
-          <p:cNvSpPr>
-            <a:spLocks noGrp="1"/>
-          </p:cNvSpPr>
-          <p:nvPr>
-            <p:ph type="title"/>
-          </p:nvPr>
-        </p:nvSpPr>
-        <p:spPr/>
-        <p:txBody>
-          <a:bodyPr/>
-          <a:lstStyle/>
-          <a:p>
-            <a:r>
-              <a:t>Conclusion</a:t>
-            </a:r>
-          </a:p>
-        </p:txBody>
-      </p:sp>
-      <p:sp>
-        <p:nvSpPr>
-          <p:cNvPr id="3" name="Content Placeholder 2"/>
-          <p:cNvSpPr>
-            <a:spLocks noGrp="1"/>
-          </p:cNvSpPr>
-          <p:nvPr>
-            <p:ph idx="1"/>
-          </p:nvPr>
-        </p:nvSpPr>
-        <p:spPr/>
-        <p:txBody>
-          <a:bodyPr/>
-          <a:lstStyle/>
-          <a:p>
-            <a:r>
-              <a:t>The Automated Backup Web Manager provides an efficient way to automate backups using Linux tools and a web interface. It improves data protection and simplifies backup management.</a:t>
-            </a:r>
+        <p:spPr>
+          <a:xfrm>
+            <a:off x="457200" y="1297858"/>
+            <a:ext cx="8229600" cy="4828305"/>
+          </a:xfrm>
+        </p:spPr>
+        <p:txBody>
+          <a:bodyPr>
+            <a:normAutofit fontScale="92500"/>
+          </a:bodyPr>
+          <a:lstStyle/>
+          <a:p>
+            <a:pPr marL="0" indent="0">
+              <a:lnSpc>
+                <a:spcPct val="160000"/>
+              </a:lnSpc>
+              <a:buNone/>
+            </a:pPr>
+            <a:r>
+              <a:rPr lang="en-US" sz="2400" dirty="0"/>
+              <a:t>• The project provides a simple and efficient automated backup solution.</a:t>
+            </a:r>
+            <a:br>
+              <a:rPr lang="en-US" sz="2400" dirty="0"/>
+            </a:br>
+            <a:r>
+              <a:rPr lang="en-US" sz="2400" dirty="0"/>
+              <a:t>• The web interface makes backup monitoring and downloading easy. </a:t>
+            </a:r>
+          </a:p>
+          <a:p>
+            <a:pPr marL="0" indent="0">
+              <a:lnSpc>
+                <a:spcPct val="160000"/>
+              </a:lnSpc>
+              <a:buNone/>
+            </a:pPr>
+            <a:r>
+              <a:rPr lang="en-US" sz="2400" dirty="0"/>
+              <a:t>• By combining Bash scripting, Cron job scheduling, and PHP-based web technologies, the system provides an efficient solution for managing backups in a centralized manner.</a:t>
+            </a:r>
+            <a:br>
+              <a:rPr lang="en-US" sz="2400" dirty="0"/>
+            </a:br>
+            <a:r>
+              <a:rPr lang="en-US" sz="2400" dirty="0"/>
+              <a:t>• It helps improve data protection and reduces manual backup effort.</a:t>
+            </a:r>
+            <a:endParaRPr sz="2400" dirty="0"/>
           </a:p>
         </p:txBody>
       </p:sp>
@@ -3451,7 +3659,7 @@
 </file>
 
 <file path=ppt/slides/slide2.xml><?xml version="1.0" encoding="utf-8"?>
-<p:sld xmlns:a="http://schemas.openxmlformats.org/drawingml/2006/main" xmlns:p="http://schemas.openxmlformats.org/presentationml/2006/main" xmlns:r="http://schemas.openxmlformats.org/officeDocument/2006/relationships">
+<p:sld xmlns:a="http://schemas.openxmlformats.org/drawingml/2006/main" xmlns:r="http://schemas.openxmlformats.org/officeDocument/2006/relationships" xmlns:p="http://schemas.openxmlformats.org/presentationml/2006/main">
   <p:cSld>
     <p:spTree>
       <p:nvGrpSpPr>
@@ -3459,7 +3667,14 @@
         <p:cNvGrpSpPr/>
         <p:nvPr/>
       </p:nvGrpSpPr>
-      <p:grpSpPr/>
+      <p:grpSpPr>
+        <a:xfrm>
+          <a:off x="0" y="0"/>
+          <a:ext cx="0" cy="0"/>
+          <a:chOff x="0" y="0"/>
+          <a:chExt cx="0" cy="0"/>
+        </a:xfrm>
+      </p:grpSpPr>
       <p:sp>
         <p:nvSpPr>
           <p:cNvPr id="2" name="Title 1"/>
@@ -3470,12 +3685,20 @@
             <p:ph type="title"/>
           </p:nvPr>
         </p:nvSpPr>
-        <p:spPr/>
-        <p:txBody>
-          <a:bodyPr/>
-          <a:lstStyle/>
-          <a:p>
-            <a:r>
+        <p:spPr>
+          <a:xfrm>
+            <a:off x="457200" y="274638"/>
+            <a:ext cx="8229600" cy="738085"/>
+          </a:xfrm>
+        </p:spPr>
+        <p:txBody>
+          <a:bodyPr>
+            <a:normAutofit fontScale="90000"/>
+          </a:bodyPr>
+          <a:lstStyle/>
+          <a:p>
+            <a:r>
+              <a:rPr dirty="0"/>
               <a:t>Introduction</a:t>
             </a:r>
           </a:p>
@@ -3491,19 +3714,65 @@
             <p:ph idx="1"/>
           </p:nvPr>
         </p:nvSpPr>
-        <p:spPr/>
-        <p:txBody>
-          <a:bodyPr/>
-          <a:lstStyle/>
-          <a:p>
-            <a:r>
-              <a:t>Data loss due to system failure, human error, or malware can cause serious problems.</a:t>
-            </a:r>
-          </a:p>
-          <a:p>
-            <a:r>
-              <a:t>Automated backups help protect important data and ensure recovery when needed.</a:t>
-            </a:r>
+        <p:spPr>
+          <a:xfrm>
+            <a:off x="457200" y="1179872"/>
+            <a:ext cx="8229600" cy="4946292"/>
+          </a:xfrm>
+        </p:spPr>
+        <p:txBody>
+          <a:bodyPr>
+            <a:normAutofit fontScale="92500" lnSpcReduction="10000"/>
+          </a:bodyPr>
+          <a:lstStyle/>
+          <a:p>
+            <a:pPr marL="0" indent="0">
+              <a:lnSpc>
+                <a:spcPct val="150000"/>
+              </a:lnSpc>
+              <a:buNone/>
+            </a:pPr>
+            <a:r>
+              <a:rPr lang="en-US" sz="2400" dirty="0"/>
+              <a:t>• Data is one of the most valuable assets for individuals and                 organizations. </a:t>
+            </a:r>
+            <a:br>
+              <a:rPr lang="en-US" sz="2400" dirty="0"/>
+            </a:br>
+            <a:r>
+              <a:rPr lang="en-US" sz="2400" dirty="0"/>
+              <a:t>• Data loss can occur due to hardware failure, accidental deletion, malware, or system crashes.</a:t>
+            </a:r>
+            <a:br>
+              <a:rPr lang="en-US" sz="2400" dirty="0"/>
+            </a:br>
+            <a:r>
+              <a:rPr lang="en-US" sz="2400" dirty="0"/>
+              <a:t>• Regular backups are essential to protect important files and ensure data recovery.</a:t>
+            </a:r>
+            <a:br>
+              <a:rPr lang="en-US" sz="2400" dirty="0"/>
+            </a:br>
+            <a:r>
+              <a:rPr lang="en-US" sz="2400" dirty="0"/>
+              <a:t>• Automated backup systems help ensure consistent and reliable data protection.</a:t>
+            </a:r>
+            <a:br>
+              <a:rPr lang="en-US" sz="2400" dirty="0"/>
+            </a:br>
+            <a:r>
+              <a:rPr lang="en-US" sz="2400" dirty="0"/>
+              <a:t>• The </a:t>
+            </a:r>
+            <a:r>
+              <a:rPr lang="en-US" sz="2400" b="1" dirty="0"/>
+              <a:t>Automated Backup Web Manager</a:t>
+            </a:r>
+            <a:r>
+              <a:rPr lang="en-US" sz="2400" dirty="0"/>
+              <a:t> simplifies backup management using Linux tools and a web interface.</a:t>
+            </a:r>
+            <a:endParaRPr sz="2400" dirty="0"/>
           </a:p>
         </p:txBody>
       </p:sp>
@@ -3516,7 +3785,7 @@
 </file>
 
 <file path=ppt/slides/slide3.xml><?xml version="1.0" encoding="utf-8"?>
-<p:sld xmlns:a="http://schemas.openxmlformats.org/drawingml/2006/main" xmlns:p="http://schemas.openxmlformats.org/presentationml/2006/main" xmlns:r="http://schemas.openxmlformats.org/officeDocument/2006/relationships">
+<p:sld xmlns:a="http://schemas.openxmlformats.org/drawingml/2006/main" xmlns:r="http://schemas.openxmlformats.org/officeDocument/2006/relationships" xmlns:p="http://schemas.openxmlformats.org/presentationml/2006/main">
   <p:cSld>
     <p:spTree>
       <p:nvGrpSpPr>
@@ -3524,7 +3793,14 @@
         <p:cNvGrpSpPr/>
         <p:nvPr/>
       </p:nvGrpSpPr>
-      <p:grpSpPr/>
+      <p:grpSpPr>
+        <a:xfrm>
+          <a:off x="0" y="0"/>
+          <a:ext cx="0" cy="0"/>
+          <a:chOff x="0" y="0"/>
+          <a:chExt cx="0" cy="0"/>
+        </a:xfrm>
+      </p:grpSpPr>
       <p:sp>
         <p:nvSpPr>
           <p:cNvPr id="2" name="Title 1"/>
@@ -3535,12 +3811,20 @@
             <p:ph type="title"/>
           </p:nvPr>
         </p:nvSpPr>
-        <p:spPr/>
-        <p:txBody>
-          <a:bodyPr/>
-          <a:lstStyle/>
-          <a:p>
-            <a:r>
+        <p:spPr>
+          <a:xfrm>
+            <a:off x="457200" y="274638"/>
+            <a:ext cx="8229600" cy="836407"/>
+          </a:xfrm>
+        </p:spPr>
+        <p:txBody>
+          <a:bodyPr>
+            <a:normAutofit/>
+          </a:bodyPr>
+          <a:lstStyle/>
+          <a:p>
+            <a:r>
+              <a:rPr sz="4000" dirty="0"/>
               <a:t>Problem Statement</a:t>
             </a:r>
           </a:p>
@@ -3556,24 +3840,64 @@
             <p:ph idx="1"/>
           </p:nvPr>
         </p:nvSpPr>
-        <p:spPr/>
-        <p:txBody>
-          <a:bodyPr/>
-          <a:lstStyle/>
-          <a:p>
-            <a:r>
-              <a:t>Manual backups are time-consuming and prone to human error.</a:t>
-            </a:r>
-          </a:p>
-          <a:p>
-            <a:r>
-              <a:t>Many systems lack centralized backup management and monitoring.</a:t>
-            </a:r>
-          </a:p>
-          <a:p>
-            <a:r>
-              <a:t>A simple automated solution is required.</a:t>
-            </a:r>
+        <p:spPr>
+          <a:xfrm>
+            <a:off x="457200" y="1199536"/>
+            <a:ext cx="8229600" cy="4926628"/>
+          </a:xfrm>
+        </p:spPr>
+        <p:txBody>
+          <a:bodyPr>
+            <a:normAutofit fontScale="92500"/>
+          </a:bodyPr>
+          <a:lstStyle/>
+          <a:p>
+            <a:pPr marL="0" indent="0">
+              <a:lnSpc>
+                <a:spcPct val="150000"/>
+              </a:lnSpc>
+              <a:buNone/>
+            </a:pPr>
+            <a:r>
+              <a:rPr lang="en-US" sz="2400" dirty="0"/>
+              <a:t>• Many users rely on manual backup methods to protect important     data.</a:t>
+            </a:r>
+            <a:br>
+              <a:rPr lang="en-US" sz="2400" dirty="0"/>
+            </a:br>
+            <a:r>
+              <a:rPr lang="en-US" sz="2400" dirty="0"/>
+              <a:t>• Manual backups are time-consuming and often forgotten.</a:t>
+            </a:r>
+            <a:br>
+              <a:rPr lang="en-US" sz="2400" dirty="0"/>
+            </a:br>
+            <a:r>
+              <a:rPr lang="en-US" sz="2400" dirty="0"/>
+              <a:t>• Lack of centralized backup management makes monitoring difficult.</a:t>
+            </a:r>
+            <a:br>
+              <a:rPr lang="en-US" sz="2400" dirty="0"/>
+            </a:br>
+            <a:r>
+              <a:rPr lang="en-US" sz="2400" dirty="0"/>
+              <a:t>• Administrators cannot easily track backup status or errors.</a:t>
+            </a:r>
+            <a:br>
+              <a:rPr lang="en-US" sz="2400" dirty="0"/>
+            </a:br>
+            <a:r>
+              <a:rPr lang="en-US" sz="2400" dirty="0"/>
+              <a:t>• Data loss due to system failures or accidental deletion can cause serious problems.</a:t>
+            </a:r>
+            <a:br>
+              <a:rPr lang="en-US" sz="2400" dirty="0"/>
+            </a:br>
+            <a:r>
+              <a:rPr lang="en-US" sz="2400" dirty="0"/>
+              <a:t>• A reliable and automated backup system is needed to ensure regular and secure data backups.</a:t>
+            </a:r>
+            <a:endParaRPr sz="2400" dirty="0"/>
           </a:p>
         </p:txBody>
       </p:sp>
@@ -3586,7 +3910,7 @@
 </file>
 
 <file path=ppt/slides/slide4.xml><?xml version="1.0" encoding="utf-8"?>
-<p:sld xmlns:a="http://schemas.openxmlformats.org/drawingml/2006/main" xmlns:p="http://schemas.openxmlformats.org/presentationml/2006/main" xmlns:r="http://schemas.openxmlformats.org/officeDocument/2006/relationships">
+<p:sld xmlns:a="http://schemas.openxmlformats.org/drawingml/2006/main" xmlns:r="http://schemas.openxmlformats.org/officeDocument/2006/relationships" xmlns:p="http://schemas.openxmlformats.org/presentationml/2006/main">
   <p:cSld>
     <p:spTree>
       <p:nvGrpSpPr>
@@ -3594,7 +3918,14 @@
         <p:cNvGrpSpPr/>
         <p:nvPr/>
       </p:nvGrpSpPr>
-      <p:grpSpPr/>
+      <p:grpSpPr>
+        <a:xfrm>
+          <a:off x="0" y="0"/>
+          <a:ext cx="0" cy="0"/>
+          <a:chOff x="0" y="0"/>
+          <a:chExt cx="0" cy="0"/>
+        </a:xfrm>
+      </p:grpSpPr>
       <p:sp>
         <p:nvSpPr>
           <p:cNvPr id="2" name="Title 1"/>
@@ -3605,12 +3936,20 @@
             <p:ph type="title"/>
           </p:nvPr>
         </p:nvSpPr>
-        <p:spPr/>
-        <p:txBody>
-          <a:bodyPr/>
-          <a:lstStyle/>
-          <a:p>
-            <a:r>
+        <p:spPr>
+          <a:xfrm>
+            <a:off x="457200" y="274638"/>
+            <a:ext cx="8229600" cy="816743"/>
+          </a:xfrm>
+        </p:spPr>
+        <p:txBody>
+          <a:bodyPr>
+            <a:normAutofit/>
+          </a:bodyPr>
+          <a:lstStyle/>
+          <a:p>
+            <a:r>
+              <a:rPr sz="4000" dirty="0"/>
               <a:t>Project Objectives</a:t>
             </a:r>
           </a:p>
@@ -3626,34 +3965,71 @@
             <p:ph idx="1"/>
           </p:nvPr>
         </p:nvSpPr>
-        <p:spPr/>
-        <p:txBody>
-          <a:bodyPr/>
-          <a:lstStyle/>
-          <a:p>
-            <a:r>
-              <a:t>• Automate directory backups</a:t>
-            </a:r>
-          </a:p>
-          <a:p>
-            <a:r>
-              <a:t>• Compress backup data</a:t>
-            </a:r>
-          </a:p>
-          <a:p>
-            <a:r>
-              <a:t>• Schedule backups automatically</a:t>
-            </a:r>
-          </a:p>
-          <a:p>
-            <a:r>
-              <a:t>• Provide a web interface for monitoring</a:t>
-            </a:r>
-          </a:p>
-          <a:p>
-            <a:r>
-              <a:t>• Allow download of backup archives</a:t>
-            </a:r>
+        <p:spPr>
+          <a:xfrm>
+            <a:off x="457200" y="1179872"/>
+            <a:ext cx="8229600" cy="4946292"/>
+          </a:xfrm>
+        </p:spPr>
+        <p:txBody>
+          <a:bodyPr>
+            <a:normAutofit/>
+          </a:bodyPr>
+          <a:lstStyle/>
+          <a:p>
+            <a:pPr>
+              <a:lnSpc>
+                <a:spcPct val="150000"/>
+              </a:lnSpc>
+            </a:pPr>
+            <a:r>
+              <a:rPr lang="en-US" sz="2400" dirty="0"/>
+              <a:t>• To develop a system that automates the backup of important directories.</a:t>
+            </a:r>
+            <a:br>
+              <a:rPr lang="en-US" sz="2400" dirty="0"/>
+            </a:br>
+            <a:r>
+              <a:rPr lang="en-US" sz="2400" dirty="0"/>
+              <a:t>• To reduce manual effort in managing system backups.</a:t>
+            </a:r>
+            <a:br>
+              <a:rPr lang="en-US" sz="2400" dirty="0"/>
+            </a:br>
+            <a:r>
+              <a:rPr lang="en-US" sz="2400" dirty="0"/>
+              <a:t>• To compress and store backup files efficiently.</a:t>
+            </a:r>
+            <a:br>
+              <a:rPr lang="en-US" sz="2400" dirty="0"/>
+            </a:br>
+            <a:r>
+              <a:rPr lang="en-US" sz="2400" dirty="0"/>
+              <a:t>• To schedule backups automatically using </a:t>
+            </a:r>
+            <a:r>
+              <a:rPr lang="en-US" sz="2400" dirty="0" err="1"/>
+              <a:t>cron</a:t>
+            </a:r>
+            <a:r>
+              <a:rPr lang="en-US" sz="2400" dirty="0"/>
+              <a:t> jobs.</a:t>
+            </a:r>
+            <a:br>
+              <a:rPr lang="en-US" sz="2400" dirty="0"/>
+            </a:br>
+            <a:r>
+              <a:rPr lang="en-US" sz="2400" dirty="0"/>
+              <a:t>• To provide a web-based interface for monitoring backups.</a:t>
+            </a:r>
+            <a:br>
+              <a:rPr lang="en-US" sz="2400" dirty="0"/>
+            </a:br>
+            <a:r>
+              <a:rPr lang="en-US" sz="2400" dirty="0"/>
+              <a:t>• To allow users to view logs and download backup archives easily.</a:t>
+            </a:r>
+            <a:endParaRPr sz="2400" dirty="0"/>
           </a:p>
         </p:txBody>
       </p:sp>
@@ -3666,7 +4042,7 @@
 </file>
 
 <file path=ppt/slides/slide5.xml><?xml version="1.0" encoding="utf-8"?>
-<p:sld xmlns:a="http://schemas.openxmlformats.org/drawingml/2006/main" xmlns:p="http://schemas.openxmlformats.org/presentationml/2006/main" xmlns:r="http://schemas.openxmlformats.org/officeDocument/2006/relationships">
+<p:sld xmlns:a="http://schemas.openxmlformats.org/drawingml/2006/main" xmlns:r="http://schemas.openxmlformats.org/officeDocument/2006/relationships" xmlns:p="http://schemas.openxmlformats.org/presentationml/2006/main">
   <p:cSld>
     <p:spTree>
       <p:nvGrpSpPr>
@@ -3674,7 +4050,14 @@
         <p:cNvGrpSpPr/>
         <p:nvPr/>
       </p:nvGrpSpPr>
-      <p:grpSpPr/>
+      <p:grpSpPr>
+        <a:xfrm>
+          <a:off x="0" y="0"/>
+          <a:ext cx="0" cy="0"/>
+          <a:chOff x="0" y="0"/>
+          <a:chExt cx="0" cy="0"/>
+        </a:xfrm>
+      </p:grpSpPr>
       <p:sp>
         <p:nvSpPr>
           <p:cNvPr id="2" name="Title 1"/>
@@ -3685,12 +4068,20 @@
             <p:ph type="title"/>
           </p:nvPr>
         </p:nvSpPr>
-        <p:spPr/>
-        <p:txBody>
-          <a:bodyPr/>
-          <a:lstStyle/>
-          <a:p>
-            <a:r>
+        <p:spPr>
+          <a:xfrm>
+            <a:off x="457200" y="274638"/>
+            <a:ext cx="8229600" cy="905233"/>
+          </a:xfrm>
+        </p:spPr>
+        <p:txBody>
+          <a:bodyPr>
+            <a:normAutofit/>
+          </a:bodyPr>
+          <a:lstStyle/>
+          <a:p>
+            <a:r>
+              <a:rPr sz="4000" dirty="0"/>
               <a:t>Project Scope</a:t>
             </a:r>
           </a:p>
@@ -3706,34 +4097,75 @@
             <p:ph idx="1"/>
           </p:nvPr>
         </p:nvSpPr>
-        <p:spPr/>
-        <p:txBody>
-          <a:bodyPr/>
-          <a:lstStyle/>
-          <a:p>
-            <a:r>
-              <a:t>• Automated directory backup</a:t>
-            </a:r>
-          </a:p>
-          <a:p>
-            <a:r>
-              <a:t>• Backup compression and storage</a:t>
-            </a:r>
-          </a:p>
-          <a:p>
-            <a:r>
-              <a:t>• Backup scheduling using cron</a:t>
-            </a:r>
-          </a:p>
-          <a:p>
-            <a:r>
-              <a:t>• Log monitoring</a:t>
-            </a:r>
-          </a:p>
-          <a:p>
-            <a:r>
-              <a:t>• Web interface for backup management</a:t>
-            </a:r>
+        <p:spPr>
+          <a:xfrm>
+            <a:off x="457200" y="1317524"/>
+            <a:ext cx="8229600" cy="4808640"/>
+          </a:xfrm>
+        </p:spPr>
+        <p:txBody>
+          <a:bodyPr>
+            <a:noAutofit/>
+          </a:bodyPr>
+          <a:lstStyle/>
+          <a:p>
+            <a:pPr marL="0" indent="0">
+              <a:lnSpc>
+                <a:spcPct val="150000"/>
+              </a:lnSpc>
+              <a:buNone/>
+            </a:pPr>
+            <a:r>
+              <a:rPr lang="en-US" sz="2400" dirty="0"/>
+              <a:t>• Automates the backup of selected directories in a Linux system.</a:t>
+            </a:r>
+            <a:br>
+              <a:rPr lang="en-US" sz="2400" dirty="0"/>
+            </a:br>
+            <a:r>
+              <a:rPr lang="en-US" sz="2400" dirty="0"/>
+              <a:t>• Compresses backup data into archive files for efficient storage.</a:t>
+            </a:r>
+            <a:br>
+              <a:rPr lang="en-US" sz="2400" dirty="0"/>
+            </a:br>
+            <a:r>
+              <a:rPr lang="en-US" sz="2400" dirty="0"/>
+              <a:t>• Uses </a:t>
+            </a:r>
+            <a:r>
+              <a:rPr lang="en-US" sz="2400" dirty="0" err="1"/>
+              <a:t>cron</a:t>
+            </a:r>
+            <a:r>
+              <a:rPr lang="en-US" sz="2400" dirty="0"/>
+              <a:t> jobs to schedule backups automatically.</a:t>
+            </a:r>
+            <a:br>
+              <a:rPr lang="en-US" sz="2400" dirty="0"/>
+            </a:br>
+            <a:r>
+              <a:rPr lang="en-US" sz="2400" dirty="0"/>
+              <a:t>• Maintains log files to track backup activities and errors.</a:t>
+            </a:r>
+            <a:br>
+              <a:rPr lang="en-US" sz="2400" dirty="0"/>
+            </a:br>
+            <a:r>
+              <a:rPr lang="en-US" sz="2400" dirty="0"/>
+              <a:t>• Provides a web interface to monitor and manage backups.</a:t>
+            </a:r>
+            <a:br>
+              <a:rPr lang="en-US" sz="2400" dirty="0"/>
+            </a:br>
+            <a:r>
+              <a:rPr lang="en-US" sz="2400" dirty="0"/>
+              <a:t>• Allows users to download backup archives through a web browser.</a:t>
+            </a:r>
+            <a:br>
+              <a:rPr lang="en-US" sz="2400" dirty="0"/>
+            </a:br>
+            <a:endParaRPr sz="2400" dirty="0"/>
           </a:p>
         </p:txBody>
       </p:sp>
@@ -3746,7 +4178,7 @@
 </file>
 
 <file path=ppt/slides/slide6.xml><?xml version="1.0" encoding="utf-8"?>
-<p:sld xmlns:a="http://schemas.openxmlformats.org/drawingml/2006/main" xmlns:p="http://schemas.openxmlformats.org/presentationml/2006/main" xmlns:r="http://schemas.openxmlformats.org/officeDocument/2006/relationships">
+<p:sld xmlns:a="http://schemas.openxmlformats.org/drawingml/2006/main" xmlns:r="http://schemas.openxmlformats.org/officeDocument/2006/relationships" xmlns:p="http://schemas.openxmlformats.org/presentationml/2006/main">
   <p:cSld>
     <p:spTree>
       <p:nvGrpSpPr>
@@ -3754,7 +4186,14 @@
         <p:cNvGrpSpPr/>
         <p:nvPr/>
       </p:nvGrpSpPr>
-      <p:grpSpPr/>
+      <p:grpSpPr>
+        <a:xfrm>
+          <a:off x="0" y="0"/>
+          <a:ext cx="0" cy="0"/>
+          <a:chOff x="0" y="0"/>
+          <a:chExt cx="0" cy="0"/>
+        </a:xfrm>
+      </p:grpSpPr>
       <p:sp>
         <p:nvSpPr>
           <p:cNvPr id="2" name="Title 1"/>
@@ -3765,63 +4204,116 @@
             <p:ph type="title"/>
           </p:nvPr>
         </p:nvSpPr>
+        <p:spPr>
+          <a:xfrm>
+            <a:off x="457200" y="274638"/>
+            <a:ext cx="8229600" cy="974059"/>
+          </a:xfrm>
+        </p:spPr>
+        <p:txBody>
+          <a:bodyPr>
+            <a:normAutofit/>
+          </a:bodyPr>
+          <a:lstStyle/>
+          <a:p>
+            <a:r>
+              <a:rPr sz="4000" dirty="0"/>
+              <a:t>Tools and Technologies</a:t>
+            </a:r>
+          </a:p>
+        </p:txBody>
+      </p:sp>
+      <p:sp>
+        <p:nvSpPr>
+          <p:cNvPr id="3" name="Content Placeholder 2"/>
+          <p:cNvSpPr>
+            <a:spLocks noGrp="1"/>
+          </p:cNvSpPr>
+          <p:nvPr>
+            <p:ph idx="1"/>
+          </p:nvPr>
+        </p:nvSpPr>
         <p:spPr/>
         <p:txBody>
-          <a:bodyPr/>
-          <a:lstStyle/>
-          <a:p>
-            <a:r>
-              <a:t>Tools and Technologies</a:t>
-            </a:r>
-          </a:p>
-        </p:txBody>
-      </p:sp>
-      <p:sp>
-        <p:nvSpPr>
-          <p:cNvPr id="3" name="Content Placeholder 2"/>
-          <p:cNvSpPr>
-            <a:spLocks noGrp="1"/>
-          </p:cNvSpPr>
-          <p:nvPr>
-            <p:ph idx="1"/>
-          </p:nvPr>
-        </p:nvSpPr>
-        <p:spPr/>
-        <p:txBody>
-          <a:bodyPr/>
-          <a:lstStyle/>
-          <a:p>
-            <a:r>
+          <a:bodyPr>
+            <a:normAutofit/>
+          </a:bodyPr>
+          <a:lstStyle/>
+          <a:p>
+            <a:pPr>
+              <a:lnSpc>
+                <a:spcPct val="150000"/>
+              </a:lnSpc>
+            </a:pPr>
+            <a:r>
+              <a:rPr sz="2400" dirty="0"/>
               <a:t>Linux OS</a:t>
             </a:r>
           </a:p>
           <a:p>
-            <a:r>
+            <a:pPr>
+              <a:lnSpc>
+                <a:spcPct val="150000"/>
+              </a:lnSpc>
+            </a:pPr>
+            <a:r>
+              <a:rPr sz="2400" dirty="0"/>
               <a:t>Bash Scripting</a:t>
             </a:r>
           </a:p>
           <a:p>
-            <a:r>
+            <a:pPr>
+              <a:lnSpc>
+                <a:spcPct val="150000"/>
+              </a:lnSpc>
+            </a:pPr>
+            <a:r>
+              <a:rPr sz="2400" dirty="0"/>
               <a:t>Cron Jobs</a:t>
             </a:r>
           </a:p>
           <a:p>
-            <a:r>
+            <a:pPr>
+              <a:lnSpc>
+                <a:spcPct val="150000"/>
+              </a:lnSpc>
+            </a:pPr>
+            <a:r>
+              <a:rPr sz="2400" dirty="0" err="1"/>
               <a:t>Rsync</a:t>
             </a:r>
-          </a:p>
-          <a:p>
-            <a:r>
+            <a:endParaRPr sz="2400" dirty="0"/>
+          </a:p>
+          <a:p>
+            <a:pPr>
+              <a:lnSpc>
+                <a:spcPct val="150000"/>
+              </a:lnSpc>
+            </a:pPr>
+            <a:r>
+              <a:rPr sz="2400" dirty="0"/>
               <a:t>Tar Utility</a:t>
             </a:r>
           </a:p>
           <a:p>
-            <a:r>
+            <a:pPr>
+              <a:lnSpc>
+                <a:spcPct val="150000"/>
+              </a:lnSpc>
+            </a:pPr>
+            <a:r>
+              <a:rPr sz="2400" dirty="0"/>
               <a:t>PHP</a:t>
             </a:r>
           </a:p>
           <a:p>
-            <a:r>
+            <a:pPr>
+              <a:lnSpc>
+                <a:spcPct val="150000"/>
+              </a:lnSpc>
+            </a:pPr>
+            <a:r>
+              <a:rPr sz="2400" dirty="0"/>
               <a:t>Apache Web Server</a:t>
             </a:r>
           </a:p>
@@ -3836,7 +4328,7 @@
 </file>
 
 <file path=ppt/slides/slide7.xml><?xml version="1.0" encoding="utf-8"?>
-<p:sld xmlns:a="http://schemas.openxmlformats.org/drawingml/2006/main" xmlns:p="http://schemas.openxmlformats.org/presentationml/2006/main" xmlns:r="http://schemas.openxmlformats.org/officeDocument/2006/relationships">
+<p:sld xmlns:a="http://schemas.openxmlformats.org/drawingml/2006/main" xmlns:r="http://schemas.openxmlformats.org/officeDocument/2006/relationships" xmlns:p="http://schemas.openxmlformats.org/presentationml/2006/main">
   <p:cSld>
     <p:spTree>
       <p:nvGrpSpPr>
@@ -3844,7 +4336,14 @@
         <p:cNvGrpSpPr/>
         <p:nvPr/>
       </p:nvGrpSpPr>
-      <p:grpSpPr/>
+      <p:grpSpPr>
+        <a:xfrm>
+          <a:off x="0" y="0"/>
+          <a:ext cx="0" cy="0"/>
+          <a:chOff x="0" y="0"/>
+          <a:chExt cx="0" cy="0"/>
+        </a:xfrm>
+      </p:grpSpPr>
       <p:sp>
         <p:nvSpPr>
           <p:cNvPr id="2" name="Title 1"/>
@@ -3855,13 +4354,21 @@
             <p:ph type="title"/>
           </p:nvPr>
         </p:nvSpPr>
-        <p:spPr/>
-        <p:txBody>
-          <a:bodyPr/>
-          <a:lstStyle/>
-          <a:p>
-            <a:r>
-              <a:t>Project Architecture</a:t>
+        <p:spPr>
+          <a:xfrm>
+            <a:off x="457200" y="274638"/>
+            <a:ext cx="8229600" cy="895401"/>
+          </a:xfrm>
+        </p:spPr>
+        <p:txBody>
+          <a:bodyPr>
+            <a:normAutofit/>
+          </a:bodyPr>
+          <a:lstStyle/>
+          <a:p>
+            <a:r>
+              <a:rPr sz="4000" dirty="0"/>
+              <a:t>Project Folder Structure</a:t>
             </a:r>
           </a:p>
         </p:txBody>
@@ -3876,14 +4383,107 @@
             <p:ph idx="1"/>
           </p:nvPr>
         </p:nvSpPr>
-        <p:spPr/>
-        <p:txBody>
-          <a:bodyPr/>
-          <a:lstStyle/>
-          <a:p>
-            <a:r>
-              <a:t>User → Web Interface → PHP Scripts → Backup Script → Rsync &amp; Tar → Backup Storage → Logs</a:t>
-            </a:r>
+        <p:spPr>
+          <a:xfrm>
+            <a:off x="457200" y="1170040"/>
+            <a:ext cx="8229600" cy="4956124"/>
+          </a:xfrm>
+        </p:spPr>
+        <p:txBody>
+          <a:bodyPr>
+            <a:normAutofit/>
+          </a:bodyPr>
+          <a:lstStyle/>
+          <a:p>
+            <a:pPr>
+              <a:lnSpc>
+                <a:spcPct val="150000"/>
+              </a:lnSpc>
+            </a:pPr>
+            <a:r>
+              <a:rPr sz="2400" dirty="0"/>
+              <a:t>/var/www/html/backup-manager</a:t>
+            </a:r>
+          </a:p>
+          <a:p>
+            <a:pPr>
+              <a:lnSpc>
+                <a:spcPct val="150000"/>
+              </a:lnSpc>
+            </a:pPr>
+            <a:r>
+              <a:rPr sz="2400" dirty="0"/>
+              <a:t>scripts/</a:t>
+            </a:r>
+          </a:p>
+          <a:p>
+            <a:pPr>
+              <a:lnSpc>
+                <a:spcPct val="150000"/>
+              </a:lnSpc>
+            </a:pPr>
+            <a:r>
+              <a:rPr sz="2400" dirty="0"/>
+              <a:t>backups/</a:t>
+            </a:r>
+          </a:p>
+          <a:p>
+            <a:pPr>
+              <a:lnSpc>
+                <a:spcPct val="150000"/>
+              </a:lnSpc>
+            </a:pPr>
+            <a:r>
+              <a:rPr sz="2400" dirty="0"/>
+              <a:t>logs/</a:t>
+            </a:r>
+          </a:p>
+          <a:p>
+            <a:pPr>
+              <a:lnSpc>
+                <a:spcPct val="150000"/>
+              </a:lnSpc>
+            </a:pPr>
+            <a:r>
+              <a:rPr sz="2400" dirty="0"/>
+              <a:t>backup.sh</a:t>
+            </a:r>
+          </a:p>
+          <a:p>
+            <a:pPr>
+              <a:lnSpc>
+                <a:spcPct val="150000"/>
+              </a:lnSpc>
+            </a:pPr>
+            <a:r>
+              <a:rPr sz="2400" dirty="0" err="1"/>
+              <a:t>index.php</a:t>
+            </a:r>
+            <a:endParaRPr sz="2400" dirty="0"/>
+          </a:p>
+          <a:p>
+            <a:pPr>
+              <a:lnSpc>
+                <a:spcPct val="150000"/>
+              </a:lnSpc>
+            </a:pPr>
+            <a:r>
+              <a:rPr sz="2400" dirty="0" err="1"/>
+              <a:t>download.php</a:t>
+            </a:r>
+            <a:endParaRPr sz="2400" dirty="0"/>
+          </a:p>
+          <a:p>
+            <a:pPr>
+              <a:lnSpc>
+                <a:spcPct val="150000"/>
+              </a:lnSpc>
+            </a:pPr>
+            <a:r>
+              <a:rPr sz="2400" dirty="0" err="1"/>
+              <a:t>logs.php</a:t>
+            </a:r>
+            <a:endParaRPr sz="2400" dirty="0"/>
           </a:p>
         </p:txBody>
       </p:sp>
@@ -3896,7 +4496,7 @@
 </file>
 
 <file path=ppt/slides/slide8.xml><?xml version="1.0" encoding="utf-8"?>
-<p:sld xmlns:a="http://schemas.openxmlformats.org/drawingml/2006/main" xmlns:p="http://schemas.openxmlformats.org/presentationml/2006/main" xmlns:r="http://schemas.openxmlformats.org/officeDocument/2006/relationships">
+<p:sld xmlns:a="http://schemas.openxmlformats.org/drawingml/2006/main" xmlns:r="http://schemas.openxmlformats.org/officeDocument/2006/relationships" xmlns:p="http://schemas.openxmlformats.org/presentationml/2006/main">
   <p:cSld>
     <p:spTree>
       <p:nvGrpSpPr>
@@ -3904,7 +4504,14 @@
         <p:cNvGrpSpPr/>
         <p:nvPr/>
       </p:nvGrpSpPr>
-      <p:grpSpPr/>
+      <p:grpSpPr>
+        <a:xfrm>
+          <a:off x="0" y="0"/>
+          <a:ext cx="0" cy="0"/>
+          <a:chOff x="0" y="0"/>
+          <a:chExt cx="0" cy="0"/>
+        </a:xfrm>
+      </p:grpSpPr>
       <p:sp>
         <p:nvSpPr>
           <p:cNvPr id="2" name="Title 1"/>
@@ -3915,13 +4522,21 @@
             <p:ph type="title"/>
           </p:nvPr>
         </p:nvSpPr>
-        <p:spPr/>
-        <p:txBody>
-          <a:bodyPr/>
-          <a:lstStyle/>
-          <a:p>
-            <a:r>
-              <a:t>Project Folder Structure</a:t>
+        <p:spPr>
+          <a:xfrm>
+            <a:off x="457200" y="274638"/>
+            <a:ext cx="8229600" cy="836407"/>
+          </a:xfrm>
+        </p:spPr>
+        <p:txBody>
+          <a:bodyPr>
+            <a:normAutofit/>
+          </a:bodyPr>
+          <a:lstStyle/>
+          <a:p>
+            <a:r>
+              <a:rPr sz="4000" dirty="0"/>
+              <a:t>Implementation Steps</a:t>
             </a:r>
           </a:p>
         </p:txBody>
@@ -3936,49 +4551,87 @@
             <p:ph idx="1"/>
           </p:nvPr>
         </p:nvSpPr>
-        <p:spPr/>
-        <p:txBody>
-          <a:bodyPr/>
-          <a:lstStyle/>
-          <a:p>
-            <a:r>
-              <a:t>/var/www/html/backup-manager</a:t>
-            </a:r>
-          </a:p>
-          <a:p>
-            <a:r>
-              <a:t>scripts/</a:t>
-            </a:r>
-          </a:p>
-          <a:p>
-            <a:r>
-              <a:t>backups/</a:t>
-            </a:r>
-          </a:p>
-          <a:p>
-            <a:r>
-              <a:t>logs/</a:t>
-            </a:r>
-          </a:p>
-          <a:p>
-            <a:r>
-              <a:t>backup.sh</a:t>
-            </a:r>
-          </a:p>
-          <a:p>
-            <a:r>
-              <a:t>index.php</a:t>
-            </a:r>
-          </a:p>
-          <a:p>
-            <a:r>
-              <a:t>download.php</a:t>
-            </a:r>
-          </a:p>
-          <a:p>
-            <a:r>
-              <a:t>logs.php</a:t>
-            </a:r>
+        <p:spPr>
+          <a:xfrm>
+            <a:off x="457200" y="1219200"/>
+            <a:ext cx="8229600" cy="4906963"/>
+          </a:xfrm>
+        </p:spPr>
+        <p:txBody>
+          <a:bodyPr>
+            <a:normAutofit/>
+          </a:bodyPr>
+          <a:lstStyle/>
+          <a:p>
+            <a:pPr marL="0" indent="0">
+              <a:lnSpc>
+                <a:spcPct val="150000"/>
+              </a:lnSpc>
+              <a:buNone/>
+            </a:pPr>
+            <a:r>
+              <a:rPr lang="en-US" sz="2400" dirty="0"/>
+              <a:t>• Set up Linux environment and Apache server</a:t>
+            </a:r>
+            <a:br>
+              <a:rPr lang="en-US" sz="2400" dirty="0"/>
+            </a:br>
+            <a:r>
+              <a:rPr lang="en-US" sz="2400" dirty="0"/>
+              <a:t>• Create project folders (scripts, backups, logs)</a:t>
+            </a:r>
+            <a:br>
+              <a:rPr lang="en-US" sz="2400" dirty="0"/>
+            </a:br>
+            <a:r>
+              <a:rPr lang="en-US" sz="2400" dirty="0"/>
+              <a:t>• Develop Bash backup script</a:t>
+            </a:r>
+            <a:br>
+              <a:rPr lang="en-US" sz="2400" dirty="0"/>
+            </a:br>
+            <a:r>
+              <a:rPr lang="en-US" sz="2400" dirty="0"/>
+              <a:t>• Use </a:t>
+            </a:r>
+            <a:r>
+              <a:rPr lang="en-US" sz="2400" dirty="0" err="1"/>
+              <a:t>rsync</a:t>
+            </a:r>
+            <a:r>
+              <a:rPr lang="en-US" sz="2400" dirty="0"/>
+              <a:t> and tar for backup and compression</a:t>
+            </a:r>
+            <a:br>
+              <a:rPr lang="en-US" sz="2400" dirty="0"/>
+            </a:br>
+            <a:r>
+              <a:rPr lang="en-US" sz="2400" dirty="0"/>
+              <a:t>• Schedule backups using </a:t>
+            </a:r>
+            <a:r>
+              <a:rPr lang="en-US" sz="2400" dirty="0" err="1"/>
+              <a:t>cron</a:t>
+            </a:r>
+            <a:r>
+              <a:rPr lang="en-US" sz="2400" dirty="0"/>
+              <a:t> jobs</a:t>
+            </a:r>
+            <a:br>
+              <a:rPr lang="en-US" sz="2400" dirty="0"/>
+            </a:br>
+            <a:r>
+              <a:rPr lang="en-US" sz="2400" dirty="0"/>
+              <a:t>• Create PHP web interface</a:t>
+            </a:r>
+            <a:br>
+              <a:rPr lang="en-US" sz="2400" dirty="0"/>
+            </a:br>
+            <a:r>
+              <a:rPr lang="en-US" sz="2400" dirty="0"/>
+              <a:t>• Test backup and download functionality</a:t>
+            </a:r>
+            <a:endParaRPr sz="2400" dirty="0"/>
           </a:p>
         </p:txBody>
       </p:sp>
@@ -3991,7 +4644,7 @@
 </file>
 
 <file path=ppt/slides/slide9.xml><?xml version="1.0" encoding="utf-8"?>
-<p:sld xmlns:a="http://schemas.openxmlformats.org/drawingml/2006/main" xmlns:p="http://schemas.openxmlformats.org/presentationml/2006/main" xmlns:r="http://schemas.openxmlformats.org/officeDocument/2006/relationships">
+<p:sld xmlns:a="http://schemas.openxmlformats.org/drawingml/2006/main" xmlns:r="http://schemas.openxmlformats.org/officeDocument/2006/relationships" xmlns:p="http://schemas.openxmlformats.org/presentationml/2006/main">
   <p:cSld>
     <p:spTree>
       <p:nvGrpSpPr>
@@ -3999,7 +4652,14 @@
         <p:cNvGrpSpPr/>
         <p:nvPr/>
       </p:nvGrpSpPr>
-      <p:grpSpPr/>
+      <p:grpSpPr>
+        <a:xfrm>
+          <a:off x="0" y="0"/>
+          <a:ext cx="0" cy="0"/>
+          <a:chOff x="0" y="0"/>
+          <a:chExt cx="0" cy="0"/>
+        </a:xfrm>
+      </p:grpSpPr>
       <p:sp>
         <p:nvSpPr>
           <p:cNvPr id="2" name="Title 1"/>
@@ -4010,13 +4670,21 @@
             <p:ph type="title"/>
           </p:nvPr>
         </p:nvSpPr>
-        <p:spPr/>
-        <p:txBody>
-          <a:bodyPr/>
-          <a:lstStyle/>
-          <a:p>
-            <a:r>
-              <a:t>Implementation Steps</a:t>
+        <p:spPr>
+          <a:xfrm>
+            <a:off x="457200" y="274638"/>
+            <a:ext cx="8229600" cy="885568"/>
+          </a:xfrm>
+        </p:spPr>
+        <p:txBody>
+          <a:bodyPr>
+            <a:normAutofit/>
+          </a:bodyPr>
+          <a:lstStyle/>
+          <a:p>
+            <a:r>
+              <a:rPr sz="4000" dirty="0"/>
+              <a:t>Advantages</a:t>
             </a:r>
           </a:p>
         </p:txBody>
@@ -4031,33 +4699,71 @@
             <p:ph idx="1"/>
           </p:nvPr>
         </p:nvSpPr>
-        <p:spPr/>
-        <p:txBody>
-          <a:bodyPr/>
-          <a:lstStyle/>
-          <a:p>
-            <a:r>
-              <a:t>1. Create project directories</a:t>
-            </a:r>
-          </a:p>
-          <a:p>
-            <a:r>
-              <a:t>2. Develop backup.sh script</a:t>
-            </a:r>
-          </a:p>
-          <a:p>
-            <a:r>
-              <a:t>3. Make script executable</a:t>
-            </a:r>
-          </a:p>
-          <a:p>
-            <a:r>
-              <a:t>4. Test manual backup</a:t>
-            </a:r>
-          </a:p>
-          <a:p>
-            <a:r>
-              <a:t>5. Configure cron job</a:t>
+        <p:spPr>
+          <a:xfrm>
+            <a:off x="457200" y="1229032"/>
+            <a:ext cx="8229600" cy="4897131"/>
+          </a:xfrm>
+        </p:spPr>
+        <p:txBody>
+          <a:bodyPr>
+            <a:normAutofit/>
+          </a:bodyPr>
+          <a:lstStyle/>
+          <a:p>
+            <a:pPr marL="0" indent="0">
+              <a:lnSpc>
+                <a:spcPct val="150000"/>
+              </a:lnSpc>
+              <a:buNone/>
+            </a:pPr>
+            <a:endParaRPr lang="en-US" sz="2400" dirty="0"/>
+          </a:p>
+          <a:p>
+            <a:pPr marL="0" indent="0">
+              <a:lnSpc>
+                <a:spcPct val="150000"/>
+              </a:lnSpc>
+              <a:buNone/>
+            </a:pPr>
+            <a:r>
+              <a:rPr lang="en-US" sz="2400" dirty="0"/>
+              <a:t>• Automates the backup process</a:t>
+            </a:r>
+            <a:br>
+              <a:rPr lang="en-US" sz="2400" dirty="0"/>
+            </a:br>
+            <a:r>
+              <a:rPr lang="en-US" sz="2400" dirty="0"/>
+              <a:t>• Reduces manual effort and human errors</a:t>
+            </a:r>
+            <a:br>
+              <a:rPr lang="en-US" sz="2400" dirty="0"/>
+            </a:br>
+            <a:r>
+              <a:rPr lang="en-US" sz="2400" dirty="0"/>
+              <a:t>• Saves storage using compressed backup files</a:t>
+            </a:r>
+            <a:br>
+              <a:rPr lang="en-US" sz="2400" dirty="0"/>
+            </a:br>
+            <a:r>
+              <a:rPr lang="en-US" sz="2400" dirty="0"/>
+              <a:t>• Easy monitoring through web interface</a:t>
+            </a:r>
+            <a:br>
+              <a:rPr lang="en-US" sz="2400" dirty="0"/>
+            </a:br>
+            <a:r>
+              <a:rPr lang="en-US" sz="2400" dirty="0"/>
+              <a:t>• Improves data safety and recovery</a:t>
+            </a:r>
+            <a:br>
+              <a:rPr lang="en-US" sz="2400" dirty="0"/>
+            </a:br>
+            <a:r>
+              <a:rPr lang="en-US" sz="2400" dirty="0"/>
+              <a:t>• Simple and efficient for Linux systems</a:t>
             </a:r>
           </a:p>
         </p:txBody>
